--- a/data-eng/decks/w4d1s2.pptx
+++ b/data-eng/decks/w4d1s2.pptx
@@ -3100,7 +3100,7 @@
       <p:grpSpPr/>
       <p:sp>
         <p:nvSpPr>
-          <p:cNvPr id="2" name="Oval 1"/>
+          <p:cNvPr id="2" name="deckgen:decor"/>
           <p:cNvSpPr/>
           <p:nvPr/>
         </p:nvSpPr>
@@ -3130,7 +3130,7 @@
       </p:sp>
       <p:sp>
         <p:nvSpPr>
-          <p:cNvPr id="3" name="Oval 2"/>
+          <p:cNvPr id="3" name="deckgen:decor"/>
           <p:cNvSpPr/>
           <p:nvPr/>
         </p:nvSpPr>
@@ -3160,7 +3160,7 @@
       </p:sp>
       <p:sp>
         <p:nvSpPr>
-          <p:cNvPr id="4" name="Oval 3"/>
+          <p:cNvPr id="4" name="deckgen:decor"/>
           <p:cNvSpPr/>
           <p:nvPr/>
         </p:nvSpPr>
@@ -3190,7 +3190,7 @@
       </p:sp>
       <p:sp>
         <p:nvSpPr>
-          <p:cNvPr id="5" name="Rectangle 4"/>
+          <p:cNvPr id="5" name="deckgen:decor"/>
           <p:cNvSpPr/>
           <p:nvPr/>
         </p:nvSpPr>
@@ -3220,7 +3220,7 @@
       </p:sp>
       <p:sp>
         <p:nvSpPr>
-          <p:cNvPr id="6" name="Oval 5"/>
+          <p:cNvPr id="6" name="deckgen:decor"/>
           <p:cNvSpPr/>
           <p:nvPr/>
         </p:nvSpPr>
@@ -3250,7 +3250,7 @@
       </p:sp>
       <p:sp>
         <p:nvSpPr>
-          <p:cNvPr id="7" name="Oval 6"/>
+          <p:cNvPr id="7" name="deckgen:decor"/>
           <p:cNvSpPr/>
           <p:nvPr/>
         </p:nvSpPr>
@@ -3280,7 +3280,7 @@
       </p:sp>
       <p:sp>
         <p:nvSpPr>
-          <p:cNvPr id="8" name="Oval 7"/>
+          <p:cNvPr id="8" name="deckgen:decor"/>
           <p:cNvSpPr/>
           <p:nvPr/>
         </p:nvSpPr>
@@ -3310,7 +3310,7 @@
       </p:sp>
       <p:sp>
         <p:nvSpPr>
-          <p:cNvPr id="9" name="Oval 8"/>
+          <p:cNvPr id="9" name="deckgen:decor"/>
           <p:cNvSpPr/>
           <p:nvPr/>
         </p:nvSpPr>
@@ -3340,7 +3340,7 @@
       </p:sp>
       <p:sp>
         <p:nvSpPr>
-          <p:cNvPr id="10" name="Rectangle 9"/>
+          <p:cNvPr id="10" name="deckgen:decor"/>
           <p:cNvSpPr/>
           <p:nvPr/>
         </p:nvSpPr>
@@ -3600,7 +3600,7 @@
       <p:grpSpPr/>
       <p:sp>
         <p:nvSpPr>
-          <p:cNvPr id="2" name="Oval 1"/>
+          <p:cNvPr id="2" name="deckgen:decor"/>
           <p:cNvSpPr/>
           <p:nvPr/>
         </p:nvSpPr>
@@ -3630,7 +3630,7 @@
       </p:sp>
       <p:sp>
         <p:nvSpPr>
-          <p:cNvPr id="3" name="Oval 2"/>
+          <p:cNvPr id="3" name="deckgen:decor"/>
           <p:cNvSpPr/>
           <p:nvPr/>
         </p:nvSpPr>
@@ -3660,7 +3660,7 @@
       </p:sp>
       <p:sp>
         <p:nvSpPr>
-          <p:cNvPr id="4" name="Oval 3"/>
+          <p:cNvPr id="4" name="deckgen:decor"/>
           <p:cNvSpPr/>
           <p:nvPr/>
         </p:nvSpPr>
@@ -4737,7 +4737,7 @@
       <p:grpSpPr/>
       <p:sp>
         <p:nvSpPr>
-          <p:cNvPr id="2" name="Oval 1"/>
+          <p:cNvPr id="2" name="deckgen:decor"/>
           <p:cNvSpPr/>
           <p:nvPr/>
         </p:nvSpPr>
@@ -4767,7 +4767,7 @@
       </p:sp>
       <p:sp>
         <p:nvSpPr>
-          <p:cNvPr id="3" name="Oval 2"/>
+          <p:cNvPr id="3" name="deckgen:decor"/>
           <p:cNvSpPr/>
           <p:nvPr/>
         </p:nvSpPr>
@@ -5544,7 +5544,7 @@
       <p:grpSpPr/>
       <p:sp>
         <p:nvSpPr>
-          <p:cNvPr id="2" name="Oval 1"/>
+          <p:cNvPr id="2" name="deckgen:decor"/>
           <p:cNvSpPr/>
           <p:nvPr/>
         </p:nvSpPr>
@@ -5574,7 +5574,7 @@
       </p:sp>
       <p:sp>
         <p:nvSpPr>
-          <p:cNvPr id="3" name="Oval 2"/>
+          <p:cNvPr id="3" name="deckgen:decor"/>
           <p:cNvSpPr/>
           <p:nvPr/>
         </p:nvSpPr>
@@ -5604,7 +5604,7 @@
       </p:sp>
       <p:sp>
         <p:nvSpPr>
-          <p:cNvPr id="4" name="Oval 3"/>
+          <p:cNvPr id="4" name="deckgen:decor"/>
           <p:cNvSpPr/>
           <p:nvPr/>
         </p:nvSpPr>
@@ -6535,7 +6535,7 @@
       <p:grpSpPr/>
       <p:sp>
         <p:nvSpPr>
-          <p:cNvPr id="2" name="Oval 1"/>
+          <p:cNvPr id="2" name="deckgen:decor"/>
           <p:cNvSpPr/>
           <p:nvPr/>
         </p:nvSpPr>
@@ -6565,7 +6565,7 @@
       </p:sp>
       <p:sp>
         <p:nvSpPr>
-          <p:cNvPr id="3" name="Oval 2"/>
+          <p:cNvPr id="3" name="deckgen:decor"/>
           <p:cNvSpPr/>
           <p:nvPr/>
         </p:nvSpPr>
@@ -6595,7 +6595,7 @@
       </p:sp>
       <p:sp>
         <p:nvSpPr>
-          <p:cNvPr id="4" name="Oval 3"/>
+          <p:cNvPr id="4" name="deckgen:decor"/>
           <p:cNvSpPr/>
           <p:nvPr/>
         </p:nvSpPr>
@@ -7728,7 +7728,7 @@
       <p:grpSpPr/>
       <p:sp>
         <p:nvSpPr>
-          <p:cNvPr id="2" name="Oval 1"/>
+          <p:cNvPr id="2" name="deckgen:decor"/>
           <p:cNvSpPr/>
           <p:nvPr/>
         </p:nvSpPr>
@@ -7758,7 +7758,7 @@
       </p:sp>
       <p:sp>
         <p:nvSpPr>
-          <p:cNvPr id="3" name="Oval 2"/>
+          <p:cNvPr id="3" name="deckgen:decor"/>
           <p:cNvSpPr/>
           <p:nvPr/>
         </p:nvSpPr>
@@ -7788,7 +7788,7 @@
       </p:sp>
       <p:sp>
         <p:nvSpPr>
-          <p:cNvPr id="4" name="Oval 3"/>
+          <p:cNvPr id="4" name="deckgen:decor"/>
           <p:cNvSpPr/>
           <p:nvPr/>
         </p:nvSpPr>
@@ -8215,7 +8215,7 @@
                 <a:ea typeface="Pretendard"/>
                 <a:cs typeface="Pretendard"/>
               </a:rPr>
-              <a:t>minio/minio — 서버</a:t>
+              <a:t>pgsty/minio — 서버</a:t>
             </a:r>
           </a:p>
         </p:txBody>
@@ -8965,7 +8965,7 @@
                 <a:ea typeface="Pretendard"/>
                 <a:cs typeface="Pretendard"/>
               </a:rPr>
-              <a:t>minio/mc — 클라이언트</a:t>
+              <a:t>pgsty/mc — 클라이언트</a:t>
             </a:r>
           </a:p>
         </p:txBody>
@@ -9443,7 +9443,7 @@
       <p:grpSpPr/>
       <p:sp>
         <p:nvSpPr>
-          <p:cNvPr id="2" name="Oval 1"/>
+          <p:cNvPr id="2" name="deckgen:decor"/>
           <p:cNvSpPr/>
           <p:nvPr/>
         </p:nvSpPr>
@@ -9473,7 +9473,7 @@
       </p:sp>
       <p:sp>
         <p:nvSpPr>
-          <p:cNvPr id="3" name="Oval 2"/>
+          <p:cNvPr id="3" name="deckgen:decor"/>
           <p:cNvSpPr/>
           <p:nvPr/>
         </p:nvSpPr>
@@ -9503,7 +9503,7 @@
       </p:sp>
       <p:sp>
         <p:nvSpPr>
-          <p:cNvPr id="4" name="Oval 3"/>
+          <p:cNvPr id="4" name="deckgen:decor"/>
           <p:cNvSpPr/>
           <p:nvPr/>
         </p:nvSpPr>
@@ -10536,7 +10536,7 @@
       <p:grpSpPr/>
       <p:sp>
         <p:nvSpPr>
-          <p:cNvPr id="2" name="Oval 1"/>
+          <p:cNvPr id="2" name="deckgen:decor"/>
           <p:cNvSpPr/>
           <p:nvPr/>
         </p:nvSpPr>
@@ -10566,7 +10566,7 @@
       </p:sp>
       <p:sp>
         <p:nvSpPr>
-          <p:cNvPr id="3" name="Oval 2"/>
+          <p:cNvPr id="3" name="deckgen:decor"/>
           <p:cNvSpPr/>
           <p:nvPr/>
         </p:nvSpPr>
@@ -10596,7 +10596,7 @@
       </p:sp>
       <p:sp>
         <p:nvSpPr>
-          <p:cNvPr id="4" name="Oval 3"/>
+          <p:cNvPr id="4" name="deckgen:decor"/>
           <p:cNvSpPr/>
           <p:nvPr/>
         </p:nvSpPr>
@@ -11727,7 +11727,7 @@
       <p:grpSpPr/>
       <p:sp>
         <p:nvSpPr>
-          <p:cNvPr id="2" name="Oval 1"/>
+          <p:cNvPr id="2" name="deckgen:decor"/>
           <p:cNvSpPr/>
           <p:nvPr/>
         </p:nvSpPr>
@@ -11757,7 +11757,7 @@
       </p:sp>
       <p:sp>
         <p:nvSpPr>
-          <p:cNvPr id="3" name="Oval 2"/>
+          <p:cNvPr id="3" name="deckgen:decor"/>
           <p:cNvSpPr/>
           <p:nvPr/>
         </p:nvSpPr>
@@ -11787,7 +11787,7 @@
       </p:sp>
       <p:sp>
         <p:nvSpPr>
-          <p:cNvPr id="4" name="Oval 3"/>
+          <p:cNvPr id="4" name="deckgen:decor"/>
           <p:cNvSpPr/>
           <p:nvPr/>
         </p:nvSpPr>
@@ -12592,7 +12592,7 @@
       <p:grpSpPr/>
       <p:sp>
         <p:nvSpPr>
-          <p:cNvPr id="2" name="Oval 1"/>
+          <p:cNvPr id="2" name="deckgen:decor"/>
           <p:cNvSpPr/>
           <p:nvPr/>
         </p:nvSpPr>
@@ -12622,7 +12622,7 @@
       </p:sp>
       <p:sp>
         <p:nvSpPr>
-          <p:cNvPr id="3" name="Oval 2"/>
+          <p:cNvPr id="3" name="deckgen:decor"/>
           <p:cNvSpPr/>
           <p:nvPr/>
         </p:nvSpPr>
@@ -12652,7 +12652,7 @@
       </p:sp>
       <p:sp>
         <p:nvSpPr>
-          <p:cNvPr id="4" name="Oval 3"/>
+          <p:cNvPr id="4" name="deckgen:decor"/>
           <p:cNvSpPr/>
           <p:nvPr/>
         </p:nvSpPr>
@@ -14223,7 +14223,7 @@
       <p:grpSpPr/>
       <p:sp>
         <p:nvSpPr>
-          <p:cNvPr id="2" name="Oval 1"/>
+          <p:cNvPr id="2" name="deckgen:decor"/>
           <p:cNvSpPr/>
           <p:nvPr/>
         </p:nvSpPr>
@@ -14253,7 +14253,7 @@
       </p:sp>
       <p:sp>
         <p:nvSpPr>
-          <p:cNvPr id="3" name="Oval 2"/>
+          <p:cNvPr id="3" name="deckgen:decor"/>
           <p:cNvSpPr/>
           <p:nvPr/>
         </p:nvSpPr>
@@ -14283,7 +14283,7 @@
       </p:sp>
       <p:sp>
         <p:nvSpPr>
-          <p:cNvPr id="4" name="Oval 3"/>
+          <p:cNvPr id="4" name="deckgen:decor"/>
           <p:cNvSpPr/>
           <p:nvPr/>
         </p:nvSpPr>

--- a/data-eng/decks/w4d1s2.pptx
+++ b/data-eng/decks/w4d1s2.pptx
@@ -3941,7 +3941,7 @@
                 <a:ea typeface="Pretendard"/>
                 <a:cs typeface="Pretendard"/>
               </a:rPr>
-              <a:t>docker compose ps 에 minio·mc 두 컨테이너가 Up</a:t>
+              <a:t>config --services 가 두 줄, ps 에 minio·mc 가 Up</a:t>
             </a:r>
           </a:p>
         </p:txBody>
@@ -4087,7 +4087,7 @@
                 <a:ea typeface="Pretendard"/>
                 <a:cs typeface="Pretendard"/>
               </a:rPr>
-              <a:t>http://localhost:9001 에 minioadmin 으로 로그인된다</a:t>
+              <a:t>localhost:9001 SILO 화면에 minioadmin 으로 로그인된다</a:t>
             </a:r>
           </a:p>
         </p:txBody>
@@ -4233,7 +4233,7 @@
                 <a:ea typeface="Pretendard"/>
                 <a:cs typeface="Pretendard"/>
               </a:rPr>
-              <a:t>호스트 200 · 안에서 minio:9000 성공 · localhost:9000 실패</a:t>
+              <a:t>호스트 200 · minio:9000 Added · localhost 는 refused</a:t>
             </a:r>
           </a:p>
         </p:txBody>
@@ -4379,7 +4379,7 @@
                 <a:ea typeface="Pretendard"/>
                 <a:cs typeface="Pretendard"/>
               </a:rPr>
-              <a:t>inspect 에 minio-data -&gt; /data, down·up 뒤에도 볼륨이 남는다</a:t>
+              <a:t>inspect 에 lakehouse_minio-data -&gt; /data, down·up 뒤에도</a:t>
             </a:r>
           </a:p>
         </p:txBody>
@@ -4525,7 +4525,7 @@
                 <a:ea typeface="Pretendard"/>
                 <a:cs typeface="Pretendard"/>
               </a:rPr>
-              <a:t>logs 에 「MinIO Object Storage Server」 배너와 API·Console 주소</a:t>
+              <a:t>logs 에 API: · WebUI: 두 주소와 기본 계정 WARN</a:t>
             </a:r>
           </a:p>
         </p:txBody>
@@ -5059,7 +5059,7 @@
                 <a:ea typeface="Pretendard"/>
                 <a:cs typeface="Pretendard"/>
               </a:rPr>
-              <a:t>mc alias set → mc mb → mc ls</a:t>
+              <a:t>mc alias list local → mb raw·warehouse</a:t>
             </a:r>
           </a:p>
         </p:txBody>
@@ -5291,7 +5291,7 @@
                 <a:ea typeface="Pretendard"/>
                 <a:cs typeface="Pretendard"/>
               </a:rPr>
-              <a:t>슬래시 키로 올려 폴더가 아님을 확인</a:t>
+              <a:t>raw/demo/dt=… 키로 폴더가 아님을 확인</a:t>
             </a:r>
           </a:p>
         </p:txBody>
@@ -5885,7 +5885,7 @@
                 <a:ea typeface="Pretendard"/>
                 <a:cs typeface="Pretendard"/>
               </a:rPr>
-              <a:t>docker-compose.yml 로 minio·mc 두 컨테이너를 Up 상태로 띄운다</a:t>
+              <a:t>히어독으로 compose 파일을 만들고 minio·mc 를 Up 으로 띄운다</a:t>
             </a:r>
           </a:p>
         </p:txBody>
@@ -6031,7 +6031,7 @@
                 <a:ea typeface="Pretendard"/>
                 <a:cs typeface="Pretendard"/>
               </a:rPr>
-              <a:t>웹 콘솔(9001)에 minioadmin 으로 로그인해 메뉴를 둘러본다</a:t>
+              <a:t>웹 콘솔(9001, SILO)에 minioadmin 으로 로그인해 둘러본다</a:t>
             </a:r>
           </a:p>
         </p:txBody>
@@ -6177,7 +6177,7 @@
                 <a:ea typeface="Pretendard"/>
                 <a:cs typeface="Pretendard"/>
               </a:rPr>
-              <a:t>컨테이너 안에서 minio:9000 은 되고 localhost:9000 은 안 됨을 본다</a:t>
+              <a:t>mc 안에서 minio:9000 은 되고 localhost:9000 은 안 됨을 본다</a:t>
             </a:r>
           </a:p>
         </p:txBody>
@@ -6771,7 +6771,7 @@
                 <a:ea typeface="Pretendard"/>
                 <a:cs typeface="Pretendard"/>
               </a:rPr>
-              <a:t>~/lakehouse 폴더를 새로 만들고 시작합니다 — 1-5 에서 배운 Compose 문법이 그대로 쓰입니다</a:t>
+              <a:t>3주차 가상환경은 끄고(deactivate) 시작합니다 — 1-5 에서 배운 Compose 문법이 그대로 쓰입니다</a:t>
             </a:r>
           </a:p>
         </p:txBody>
@@ -6917,7 +6917,7 @@
                 <a:ea typeface="Pretendard"/>
                 <a:cs typeface="Pretendard"/>
               </a:rPr>
-              <a:t>~/lakehouse</a:t>
+              <a:t>히어독</a:t>
             </a:r>
           </a:p>
           <a:p>
@@ -6935,7 +6935,7 @@
                 <a:ea typeface="Pretendard"/>
                 <a:cs typeface="Pretendard"/>
               </a:rPr>
-              <a:t>compose 파일</a:t>
+              <a:t>config --services</a:t>
             </a:r>
           </a:p>
         </p:txBody>
@@ -7099,7 +7099,7 @@
                 <a:ea typeface="Pretendard"/>
                 <a:cs typeface="Pretendard"/>
               </a:rPr>
-              <a:t>둘러보기</a:t>
+              <a:t>SILO 로그인</a:t>
             </a:r>
           </a:p>
         </p:txBody>
@@ -7245,7 +7245,7 @@
                 <a:ea typeface="Pretendard"/>
                 <a:cs typeface="Pretendard"/>
               </a:rPr>
-              <a:t>minio:9000 vs</a:t>
+              <a:t>mc alias set</a:t>
             </a:r>
           </a:p>
           <a:p>
@@ -7263,7 +7263,7 @@
                 <a:ea typeface="Pretendard"/>
                 <a:cs typeface="Pretendard"/>
               </a:rPr>
-              <a:t>localhost:9000</a:t>
+              <a:t>minio vs localhost</a:t>
             </a:r>
           </a:p>
         </p:txBody>
@@ -7409,25 +7409,25 @@
                 <a:ea typeface="Pretendard"/>
                 <a:cs typeface="Pretendard"/>
               </a:rPr>
+              <a:t>inspect</a:t>
+            </a:r>
+          </a:p>
+          <a:p>
+            <a:pPr algn="ctr">
+              <a:lnSpc>
+                <a:spcPct val="146000"/>
+              </a:lnSpc>
+            </a:pPr>
+            <a:r>
+              <a:rPr sz="2100" b="0">
+                <a:solidFill>
+                  <a:srgbClr val="3D3D3D"/>
+                </a:solidFill>
+                <a:latin typeface="Pretendard"/>
+                <a:ea typeface="Pretendard"/>
+                <a:cs typeface="Pretendard"/>
+              </a:rPr>
               <a:t>down → up</a:t>
-            </a:r>
-          </a:p>
-          <a:p>
-            <a:pPr algn="ctr">
-              <a:lnSpc>
-                <a:spcPct val="146000"/>
-              </a:lnSpc>
-            </a:pPr>
-            <a:r>
-              <a:rPr sz="2100" b="0">
-                <a:solidFill>
-                  <a:srgbClr val="3D3D3D"/>
-                </a:solidFill>
-                <a:latin typeface="Pretendard"/>
-                <a:ea typeface="Pretendard"/>
-                <a:cs typeface="Pretendard"/>
-              </a:rPr>
-              <a:t>minio-data 확인</a:t>
             </a:r>
           </a:p>
         </p:txBody>
@@ -7591,7 +7591,7 @@
                 <a:ea typeface="Pretendard"/>
                 <a:cs typeface="Pretendard"/>
               </a:rPr>
-              <a:t>배너 확인</a:t>
+              <a:t>API · WebUI</a:t>
             </a:r>
           </a:p>
         </p:txBody>
@@ -7893,7 +7893,7 @@
                 <a:ea typeface="Pretendard"/>
                 <a:cs typeface="Pretendard"/>
               </a:rPr>
-              <a:t>docker-compose.yml — 설정 한 줄씩 뜻</a:t>
+              <a:t>폴더 → 히어독 → 검증 → 기동</a:t>
             </a:r>
           </a:p>
         </p:txBody>
@@ -7930,16 +7930,50 @@
       </p:sp>
       <p:sp>
         <p:nvSpPr>
-          <p:cNvPr id="8" name="Rectangle 7"/>
-          <p:cNvSpPr/>
-          <p:nvPr/>
-        </p:nvSpPr>
-        <p:spPr>
-          <a:xfrm>
-            <a:off x="1143000" y="2781300"/>
-            <a:ext cx="5722620" cy="590550"/>
-          </a:xfrm>
-          <a:prstGeom prst="rect">
+          <p:cNvPr id="8" name="Rounded Rectangle 7"/>
+          <p:cNvSpPr/>
+          <p:nvPr/>
+        </p:nvSpPr>
+        <p:spPr>
+          <a:xfrm>
+            <a:off x="1143000" y="2933700"/>
+            <a:ext cx="11430000" cy="1095375"/>
+          </a:xfrm>
+          <a:prstGeom prst="roundRect">
+            <a:avLst>
+              <a:gd name="adj" fmla="val 4347"/>
+            </a:avLst>
+          </a:prstGeom>
+          <a:solidFill>
+            <a:srgbClr val="FAFBFD"/>
+          </a:solidFill>
+          <a:ln w="9525">
+            <a:solidFill>
+              <a:srgbClr val="DCE1E8"/>
+            </a:solidFill>
+          </a:ln>
+          <a:effectLst/>
+        </p:spPr>
+        <p:txBody>
+          <a:bodyPr rtlCol="0" anchor="ctr" wrap="square"/>
+          <a:lstStyle/>
+          <a:p>
+            <a:pPr algn="ctr"/>
+          </a:p>
+        </p:txBody>
+      </p:sp>
+      <p:sp>
+        <p:nvSpPr>
+          <p:cNvPr id="9" name="Oval 8"/>
+          <p:cNvSpPr/>
+          <p:nvPr/>
+        </p:nvSpPr>
+        <p:spPr>
+          <a:xfrm>
+            <a:off x="1447800" y="3181350"/>
+            <a:ext cx="590550" cy="590550"/>
+          </a:xfrm>
+          <a:prstGeom prst="ellipse">
             <a:avLst/>
           </a:prstGeom>
           <a:solidFill>
@@ -7960,22 +7994,22 @@
       </p:sp>
       <p:sp>
         <p:nvSpPr>
-          <p:cNvPr id="9" name="TextBox 8"/>
-          <p:cNvSpPr txBox="1"/>
-          <p:nvPr/>
-        </p:nvSpPr>
-        <p:spPr>
-          <a:xfrm>
-            <a:off x="1143000" y="2781300"/>
-            <a:ext cx="5722620" cy="590550"/>
-          </a:xfrm>
-          <a:prstGeom prst="rect">
-            <a:avLst/>
-          </a:prstGeom>
-          <a:noFill/>
-        </p:spPr>
-        <p:txBody>
-          <a:bodyPr wrap="square" lIns="0" rIns="0" tIns="0" bIns="0" anchor="ctr">
+          <p:cNvPr id="10" name="TextBox 9"/>
+          <p:cNvSpPr txBox="1"/>
+          <p:nvPr/>
+        </p:nvSpPr>
+        <p:spPr>
+          <a:xfrm>
+            <a:off x="1447800" y="3333750"/>
+            <a:ext cx="590550" cy="323850"/>
+          </a:xfrm>
+          <a:prstGeom prst="rect">
+            <a:avLst/>
+          </a:prstGeom>
+          <a:noFill/>
+        </p:spPr>
+        <p:txBody>
+          <a:bodyPr wrap="square" lIns="0" rIns="0" tIns="0" bIns="0" anchor="t">
             <a:spAutoFit/>
           </a:bodyPr>
           <a:lstStyle/>
@@ -7986,7 +8020,7 @@
               </a:lnSpc>
             </a:pPr>
             <a:r>
-              <a:rPr sz="2025" b="1">
+              <a:rPr sz="2250" b="1">
                 <a:solidFill>
                   <a:srgbClr val="FFFFFF"/>
                 </a:solidFill>
@@ -7994,27 +8028,143 @@
                 <a:ea typeface="Pretendard"/>
                 <a:cs typeface="Pretendard"/>
               </a:rPr>
-              <a:t>설정</a:t>
-            </a:r>
-          </a:p>
-        </p:txBody>
-      </p:sp>
-      <p:sp>
-        <p:nvSpPr>
-          <p:cNvPr id="10" name="Rectangle 9"/>
-          <p:cNvSpPr/>
-          <p:nvPr/>
-        </p:nvSpPr>
-        <p:spPr>
-          <a:xfrm>
-            <a:off x="6903720" y="2781300"/>
-            <a:ext cx="10241280" cy="590550"/>
-          </a:xfrm>
-          <a:prstGeom prst="rect">
-            <a:avLst/>
-          </a:prstGeom>
-          <a:solidFill>
-            <a:srgbClr val="1E5BC6"/>
+              <a:t>1</a:t>
+            </a:r>
+          </a:p>
+        </p:txBody>
+      </p:sp>
+      <p:sp>
+        <p:nvSpPr>
+          <p:cNvPr id="11" name="TextBox 10"/>
+          <p:cNvSpPr txBox="1"/>
+          <p:nvPr/>
+        </p:nvSpPr>
+        <p:spPr>
+          <a:xfrm>
+            <a:off x="2324100" y="3143250"/>
+            <a:ext cx="9906000" cy="400050"/>
+          </a:xfrm>
+          <a:prstGeom prst="rect">
+            <a:avLst/>
+          </a:prstGeom>
+          <a:noFill/>
+        </p:spPr>
+        <p:txBody>
+          <a:bodyPr wrap="square" lIns="0" rIns="0" tIns="0" bIns="0" anchor="t">
+            <a:spAutoFit/>
+          </a:bodyPr>
+          <a:lstStyle/>
+          <a:p>
+            <a:pPr algn="l">
+              <a:lnSpc>
+                <a:spcPct val="110000"/>
+              </a:lnSpc>
+            </a:pPr>
+            <a:r>
+              <a:rPr sz="2475" b="1">
+                <a:solidFill>
+                  <a:srgbClr val="0D2B5E"/>
+                </a:solidFill>
+                <a:latin typeface="Pretendard"/>
+                <a:ea typeface="Pretendard"/>
+                <a:cs typeface="Pretendard"/>
+              </a:rPr>
+              <a:t>mkdir -p ~/lakehouse/data → cd ~/lakehouse</a:t>
+            </a:r>
+          </a:p>
+        </p:txBody>
+      </p:sp>
+      <p:sp>
+        <p:nvSpPr>
+          <p:cNvPr id="12" name="TextBox 11"/>
+          <p:cNvSpPr txBox="1"/>
+          <p:nvPr/>
+        </p:nvSpPr>
+        <p:spPr>
+          <a:xfrm>
+            <a:off x="2324100" y="3543300"/>
+            <a:ext cx="9906000" cy="361950"/>
+          </a:xfrm>
+          <a:prstGeom prst="rect">
+            <a:avLst/>
+          </a:prstGeom>
+          <a:noFill/>
+        </p:spPr>
+        <p:txBody>
+          <a:bodyPr wrap="square" lIns="0" rIns="0" tIns="0" bIns="0" anchor="t">
+            <a:spAutoFit/>
+          </a:bodyPr>
+          <a:lstStyle/>
+          <a:p>
+            <a:pPr algn="l">
+              <a:lnSpc>
+                <a:spcPct val="120000"/>
+              </a:lnSpc>
+            </a:pPr>
+            <a:r>
+              <a:rPr sz="2025" b="0">
+                <a:solidFill>
+                  <a:srgbClr val="3D3D3D"/>
+                </a:solidFill>
+                <a:latin typeface="Pretendard"/>
+                <a:ea typeface="Pretendard"/>
+                <a:cs typeface="Pretendard"/>
+              </a:rPr>
+              <a:t>deactivate 로 3주차 가상환경부터 끈다 — 꺼져 있으면 아무 일도 없다</a:t>
+            </a:r>
+          </a:p>
+        </p:txBody>
+      </p:sp>
+      <p:sp>
+        <p:nvSpPr>
+          <p:cNvPr id="13" name="Rounded Rectangle 12"/>
+          <p:cNvSpPr/>
+          <p:nvPr/>
+        </p:nvSpPr>
+        <p:spPr>
+          <a:xfrm>
+            <a:off x="1143000" y="4200525"/>
+            <a:ext cx="11430000" cy="1095375"/>
+          </a:xfrm>
+          <a:prstGeom prst="roundRect">
+            <a:avLst>
+              <a:gd name="adj" fmla="val 4347"/>
+            </a:avLst>
+          </a:prstGeom>
+          <a:solidFill>
+            <a:srgbClr val="FAFBFD"/>
+          </a:solidFill>
+          <a:ln w="9525">
+            <a:solidFill>
+              <a:srgbClr val="DCE1E8"/>
+            </a:solidFill>
+          </a:ln>
+          <a:effectLst/>
+        </p:spPr>
+        <p:txBody>
+          <a:bodyPr rtlCol="0" anchor="ctr" wrap="square"/>
+          <a:lstStyle/>
+          <a:p>
+            <a:pPr algn="ctr"/>
+          </a:p>
+        </p:txBody>
+      </p:sp>
+      <p:sp>
+        <p:nvSpPr>
+          <p:cNvPr id="14" name="Oval 13"/>
+          <p:cNvSpPr/>
+          <p:nvPr/>
+        </p:nvSpPr>
+        <p:spPr>
+          <a:xfrm>
+            <a:off x="1447800" y="4448175"/>
+            <a:ext cx="590550" cy="590550"/>
+          </a:xfrm>
+          <a:prstGeom prst="ellipse">
+            <a:avLst/>
+          </a:prstGeom>
+          <a:solidFill>
+            <a:srgbClr val="0D2B5E"/>
           </a:solidFill>
           <a:ln>
             <a:noFill/>
@@ -8031,22 +8181,22 @@
       </p:sp>
       <p:sp>
         <p:nvSpPr>
-          <p:cNvPr id="11" name="TextBox 10"/>
-          <p:cNvSpPr txBox="1"/>
-          <p:nvPr/>
-        </p:nvSpPr>
-        <p:spPr>
-          <a:xfrm>
-            <a:off x="6903720" y="2781300"/>
-            <a:ext cx="10241280" cy="590550"/>
-          </a:xfrm>
-          <a:prstGeom prst="rect">
-            <a:avLst/>
-          </a:prstGeom>
-          <a:noFill/>
-        </p:spPr>
-        <p:txBody>
-          <a:bodyPr wrap="square" lIns="0" rIns="0" tIns="0" bIns="0" anchor="ctr">
+          <p:cNvPr id="15" name="TextBox 14"/>
+          <p:cNvSpPr txBox="1"/>
+          <p:nvPr/>
+        </p:nvSpPr>
+        <p:spPr>
+          <a:xfrm>
+            <a:off x="1447800" y="4600575"/>
+            <a:ext cx="590550" cy="323850"/>
+          </a:xfrm>
+          <a:prstGeom prst="rect">
+            <a:avLst/>
+          </a:prstGeom>
+          <a:noFill/>
+        </p:spPr>
+        <p:txBody>
+          <a:bodyPr wrap="square" lIns="0" rIns="0" tIns="0" bIns="0" anchor="t">
             <a:spAutoFit/>
           </a:bodyPr>
           <a:lstStyle/>
@@ -8057,7 +8207,7 @@
               </a:lnSpc>
             </a:pPr>
             <a:r>
-              <a:rPr sz="2025" b="1">
+              <a:rPr sz="2250" b="1">
                 <a:solidFill>
                   <a:srgbClr val="FFFFFF"/>
                 </a:solidFill>
@@ -8065,25 +8215,481 @@
                 <a:ea typeface="Pretendard"/>
                 <a:cs typeface="Pretendard"/>
               </a:rPr>
-              <a:t>뜻</a:t>
-            </a:r>
-          </a:p>
-        </p:txBody>
-      </p:sp>
-      <p:sp>
-        <p:nvSpPr>
-          <p:cNvPr id="12" name="Rounded Rectangle 11"/>
-          <p:cNvSpPr/>
-          <p:nvPr/>
-        </p:nvSpPr>
-        <p:spPr>
-          <a:xfrm>
-            <a:off x="1143000" y="3448050"/>
-            <a:ext cx="5722620" cy="445294"/>
+              <a:t>2</a:t>
+            </a:r>
+          </a:p>
+        </p:txBody>
+      </p:sp>
+      <p:sp>
+        <p:nvSpPr>
+          <p:cNvPr id="16" name="TextBox 15"/>
+          <p:cNvSpPr txBox="1"/>
+          <p:nvPr/>
+        </p:nvSpPr>
+        <p:spPr>
+          <a:xfrm>
+            <a:off x="2324100" y="4410075"/>
+            <a:ext cx="9906000" cy="400050"/>
+          </a:xfrm>
+          <a:prstGeom prst="rect">
+            <a:avLst/>
+          </a:prstGeom>
+          <a:noFill/>
+        </p:spPr>
+        <p:txBody>
+          <a:bodyPr wrap="square" lIns="0" rIns="0" tIns="0" bIns="0" anchor="t">
+            <a:spAutoFit/>
+          </a:bodyPr>
+          <a:lstStyle/>
+          <a:p>
+            <a:pPr algn="l">
+              <a:lnSpc>
+                <a:spcPct val="110000"/>
+              </a:lnSpc>
+            </a:pPr>
+            <a:r>
+              <a:rPr sz="2475" b="1">
+                <a:solidFill>
+                  <a:srgbClr val="0D2B5E"/>
+                </a:solidFill>
+                <a:latin typeface="Pretendard"/>
+                <a:ea typeface="Pretendard"/>
+                <a:cs typeface="Pretendard"/>
+              </a:rPr>
+              <a:t>cat &gt; docker-compose.yml &lt;&lt; 'EOF' … EOF</a:t>
+            </a:r>
+          </a:p>
+        </p:txBody>
+      </p:sp>
+      <p:sp>
+        <p:nvSpPr>
+          <p:cNvPr id="17" name="TextBox 16"/>
+          <p:cNvSpPr txBox="1"/>
+          <p:nvPr/>
+        </p:nvSpPr>
+        <p:spPr>
+          <a:xfrm>
+            <a:off x="2324100" y="4810125"/>
+            <a:ext cx="9906000" cy="361950"/>
+          </a:xfrm>
+          <a:prstGeom prst="rect">
+            <a:avLst/>
+          </a:prstGeom>
+          <a:noFill/>
+        </p:spPr>
+        <p:txBody>
+          <a:bodyPr wrap="square" lIns="0" rIns="0" tIns="0" bIns="0" anchor="t">
+            <a:spAutoFit/>
+          </a:bodyPr>
+          <a:lstStyle/>
+          <a:p>
+            <a:pPr algn="l">
+              <a:lnSpc>
+                <a:spcPct val="120000"/>
+              </a:lnSpc>
+            </a:pPr>
+            <a:r>
+              <a:rPr sz="2025" b="0">
+                <a:solidFill>
+                  <a:srgbClr val="3D3D3D"/>
+                </a:solidFill>
+                <a:latin typeface="Pretendard"/>
+                <a:ea typeface="Pretendard"/>
+                <a:cs typeface="Pretendard"/>
+              </a:rPr>
+              <a:t>블록을 통째로 붙여 넣기 — EOF 줄까지가 파일, OS 셋 모두 같다</a:t>
+            </a:r>
+          </a:p>
+        </p:txBody>
+      </p:sp>
+      <p:sp>
+        <p:nvSpPr>
+          <p:cNvPr id="18" name="Rounded Rectangle 17"/>
+          <p:cNvSpPr/>
+          <p:nvPr/>
+        </p:nvSpPr>
+        <p:spPr>
+          <a:xfrm>
+            <a:off x="1143000" y="5467350"/>
+            <a:ext cx="11430000" cy="1095375"/>
           </a:xfrm>
           <a:prstGeom prst="roundRect">
             <a:avLst>
-              <a:gd name="adj" fmla="val 8556"/>
+              <a:gd name="adj" fmla="val 4347"/>
+            </a:avLst>
+          </a:prstGeom>
+          <a:solidFill>
+            <a:srgbClr val="FAFBFD"/>
+          </a:solidFill>
+          <a:ln w="9525">
+            <a:solidFill>
+              <a:srgbClr val="DCE1E8"/>
+            </a:solidFill>
+          </a:ln>
+          <a:effectLst/>
+        </p:spPr>
+        <p:txBody>
+          <a:bodyPr rtlCol="0" anchor="ctr" wrap="square"/>
+          <a:lstStyle/>
+          <a:p>
+            <a:pPr algn="ctr"/>
+          </a:p>
+        </p:txBody>
+      </p:sp>
+      <p:sp>
+        <p:nvSpPr>
+          <p:cNvPr id="19" name="Oval 18"/>
+          <p:cNvSpPr/>
+          <p:nvPr/>
+        </p:nvSpPr>
+        <p:spPr>
+          <a:xfrm>
+            <a:off x="1447800" y="5715000"/>
+            <a:ext cx="590550" cy="590550"/>
+          </a:xfrm>
+          <a:prstGeom prst="ellipse">
+            <a:avLst/>
+          </a:prstGeom>
+          <a:solidFill>
+            <a:srgbClr val="0D2B5E"/>
+          </a:solidFill>
+          <a:ln>
+            <a:noFill/>
+          </a:ln>
+          <a:effectLst/>
+        </p:spPr>
+        <p:txBody>
+          <a:bodyPr rtlCol="0" anchor="ctr" wrap="square"/>
+          <a:lstStyle/>
+          <a:p>
+            <a:pPr algn="ctr"/>
+          </a:p>
+        </p:txBody>
+      </p:sp>
+      <p:sp>
+        <p:nvSpPr>
+          <p:cNvPr id="20" name="TextBox 19"/>
+          <p:cNvSpPr txBox="1"/>
+          <p:nvPr/>
+        </p:nvSpPr>
+        <p:spPr>
+          <a:xfrm>
+            <a:off x="1447800" y="5867400"/>
+            <a:ext cx="590550" cy="323850"/>
+          </a:xfrm>
+          <a:prstGeom prst="rect">
+            <a:avLst/>
+          </a:prstGeom>
+          <a:noFill/>
+        </p:spPr>
+        <p:txBody>
+          <a:bodyPr wrap="square" lIns="0" rIns="0" tIns="0" bIns="0" anchor="t">
+            <a:spAutoFit/>
+          </a:bodyPr>
+          <a:lstStyle/>
+          <a:p>
+            <a:pPr algn="ctr">
+              <a:lnSpc>
+                <a:spcPct val="100000"/>
+              </a:lnSpc>
+            </a:pPr>
+            <a:r>
+              <a:rPr sz="2250" b="1">
+                <a:solidFill>
+                  <a:srgbClr val="FFFFFF"/>
+                </a:solidFill>
+                <a:latin typeface="Pretendard"/>
+                <a:ea typeface="Pretendard"/>
+                <a:cs typeface="Pretendard"/>
+              </a:rPr>
+              <a:t>3</a:t>
+            </a:r>
+          </a:p>
+        </p:txBody>
+      </p:sp>
+      <p:sp>
+        <p:nvSpPr>
+          <p:cNvPr id="21" name="TextBox 20"/>
+          <p:cNvSpPr txBox="1"/>
+          <p:nvPr/>
+        </p:nvSpPr>
+        <p:spPr>
+          <a:xfrm>
+            <a:off x="2324100" y="5676900"/>
+            <a:ext cx="9906000" cy="400050"/>
+          </a:xfrm>
+          <a:prstGeom prst="rect">
+            <a:avLst/>
+          </a:prstGeom>
+          <a:noFill/>
+        </p:spPr>
+        <p:txBody>
+          <a:bodyPr wrap="square" lIns="0" rIns="0" tIns="0" bIns="0" anchor="t">
+            <a:spAutoFit/>
+          </a:bodyPr>
+          <a:lstStyle/>
+          <a:p>
+            <a:pPr algn="l">
+              <a:lnSpc>
+                <a:spcPct val="110000"/>
+              </a:lnSpc>
+            </a:pPr>
+            <a:r>
+              <a:rPr sz="2475" b="1">
+                <a:solidFill>
+                  <a:srgbClr val="0D2B5E"/>
+                </a:solidFill>
+                <a:latin typeface="Pretendard"/>
+                <a:ea typeface="Pretendard"/>
+                <a:cs typeface="Pretendard"/>
+              </a:rPr>
+              <a:t>docker compose config --services</a:t>
+            </a:r>
+          </a:p>
+        </p:txBody>
+      </p:sp>
+      <p:sp>
+        <p:nvSpPr>
+          <p:cNvPr id="22" name="TextBox 21"/>
+          <p:cNvSpPr txBox="1"/>
+          <p:nvPr/>
+        </p:nvSpPr>
+        <p:spPr>
+          <a:xfrm>
+            <a:off x="2324100" y="6076950"/>
+            <a:ext cx="9906000" cy="361950"/>
+          </a:xfrm>
+          <a:prstGeom prst="rect">
+            <a:avLst/>
+          </a:prstGeom>
+          <a:noFill/>
+        </p:spPr>
+        <p:txBody>
+          <a:bodyPr wrap="square" lIns="0" rIns="0" tIns="0" bIns="0" anchor="t">
+            <a:spAutoFit/>
+          </a:bodyPr>
+          <a:lstStyle/>
+          <a:p>
+            <a:pPr algn="l">
+              <a:lnSpc>
+                <a:spcPct val="120000"/>
+              </a:lnSpc>
+            </a:pPr>
+            <a:r>
+              <a:rPr sz="2025" b="0">
+                <a:solidFill>
+                  <a:srgbClr val="3D3D3D"/>
+                </a:solidFill>
+                <a:latin typeface="Pretendard"/>
+                <a:ea typeface="Pretendard"/>
+                <a:cs typeface="Pretendard"/>
+              </a:rPr>
+              <a:t>minio · mc 두 줄 — 파일이 문법대로 쓰였다는 뜻</a:t>
+            </a:r>
+          </a:p>
+        </p:txBody>
+      </p:sp>
+      <p:sp>
+        <p:nvSpPr>
+          <p:cNvPr id="23" name="Rounded Rectangle 22"/>
+          <p:cNvSpPr/>
+          <p:nvPr/>
+        </p:nvSpPr>
+        <p:spPr>
+          <a:xfrm>
+            <a:off x="1143000" y="6734175"/>
+            <a:ext cx="11430000" cy="1095375"/>
+          </a:xfrm>
+          <a:prstGeom prst="roundRect">
+            <a:avLst>
+              <a:gd name="adj" fmla="val 4347"/>
+            </a:avLst>
+          </a:prstGeom>
+          <a:solidFill>
+            <a:srgbClr val="FAFBFD"/>
+          </a:solidFill>
+          <a:ln w="9525">
+            <a:solidFill>
+              <a:srgbClr val="DCE1E8"/>
+            </a:solidFill>
+          </a:ln>
+          <a:effectLst/>
+        </p:spPr>
+        <p:txBody>
+          <a:bodyPr rtlCol="0" anchor="ctr" wrap="square"/>
+          <a:lstStyle/>
+          <a:p>
+            <a:pPr algn="ctr"/>
+          </a:p>
+        </p:txBody>
+      </p:sp>
+      <p:sp>
+        <p:nvSpPr>
+          <p:cNvPr id="24" name="Oval 23"/>
+          <p:cNvSpPr/>
+          <p:nvPr/>
+        </p:nvSpPr>
+        <p:spPr>
+          <a:xfrm>
+            <a:off x="1447800" y="6981825"/>
+            <a:ext cx="590550" cy="590550"/>
+          </a:xfrm>
+          <a:prstGeom prst="ellipse">
+            <a:avLst/>
+          </a:prstGeom>
+          <a:solidFill>
+            <a:srgbClr val="0D2B5E"/>
+          </a:solidFill>
+          <a:ln>
+            <a:noFill/>
+          </a:ln>
+          <a:effectLst/>
+        </p:spPr>
+        <p:txBody>
+          <a:bodyPr rtlCol="0" anchor="ctr" wrap="square"/>
+          <a:lstStyle/>
+          <a:p>
+            <a:pPr algn="ctr"/>
+          </a:p>
+        </p:txBody>
+      </p:sp>
+      <p:sp>
+        <p:nvSpPr>
+          <p:cNvPr id="25" name="TextBox 24"/>
+          <p:cNvSpPr txBox="1"/>
+          <p:nvPr/>
+        </p:nvSpPr>
+        <p:spPr>
+          <a:xfrm>
+            <a:off x="1447800" y="7134225"/>
+            <a:ext cx="590550" cy="323850"/>
+          </a:xfrm>
+          <a:prstGeom prst="rect">
+            <a:avLst/>
+          </a:prstGeom>
+          <a:noFill/>
+        </p:spPr>
+        <p:txBody>
+          <a:bodyPr wrap="square" lIns="0" rIns="0" tIns="0" bIns="0" anchor="t">
+            <a:spAutoFit/>
+          </a:bodyPr>
+          <a:lstStyle/>
+          <a:p>
+            <a:pPr algn="ctr">
+              <a:lnSpc>
+                <a:spcPct val="100000"/>
+              </a:lnSpc>
+            </a:pPr>
+            <a:r>
+              <a:rPr sz="2250" b="1">
+                <a:solidFill>
+                  <a:srgbClr val="FFFFFF"/>
+                </a:solidFill>
+                <a:latin typeface="Pretendard"/>
+                <a:ea typeface="Pretendard"/>
+                <a:cs typeface="Pretendard"/>
+              </a:rPr>
+              <a:t>4</a:t>
+            </a:r>
+          </a:p>
+        </p:txBody>
+      </p:sp>
+      <p:sp>
+        <p:nvSpPr>
+          <p:cNvPr id="26" name="TextBox 25"/>
+          <p:cNvSpPr txBox="1"/>
+          <p:nvPr/>
+        </p:nvSpPr>
+        <p:spPr>
+          <a:xfrm>
+            <a:off x="2324100" y="6943725"/>
+            <a:ext cx="9906000" cy="400050"/>
+          </a:xfrm>
+          <a:prstGeom prst="rect">
+            <a:avLst/>
+          </a:prstGeom>
+          <a:noFill/>
+        </p:spPr>
+        <p:txBody>
+          <a:bodyPr wrap="square" lIns="0" rIns="0" tIns="0" bIns="0" anchor="t">
+            <a:spAutoFit/>
+          </a:bodyPr>
+          <a:lstStyle/>
+          <a:p>
+            <a:pPr algn="l">
+              <a:lnSpc>
+                <a:spcPct val="110000"/>
+              </a:lnSpc>
+            </a:pPr>
+            <a:r>
+              <a:rPr sz="2475" b="1">
+                <a:solidFill>
+                  <a:srgbClr val="0D2B5E"/>
+                </a:solidFill>
+                <a:latin typeface="Pretendard"/>
+                <a:ea typeface="Pretendard"/>
+                <a:cs typeface="Pretendard"/>
+              </a:rPr>
+              <a:t>docker compose up -d → docker compose ps</a:t>
+            </a:r>
+          </a:p>
+        </p:txBody>
+      </p:sp>
+      <p:sp>
+        <p:nvSpPr>
+          <p:cNvPr id="27" name="TextBox 26"/>
+          <p:cNvSpPr txBox="1"/>
+          <p:nvPr/>
+        </p:nvSpPr>
+        <p:spPr>
+          <a:xfrm>
+            <a:off x="2324100" y="7343775"/>
+            <a:ext cx="9906000" cy="361950"/>
+          </a:xfrm>
+          <a:prstGeom prst="rect">
+            <a:avLst/>
+          </a:prstGeom>
+          <a:noFill/>
+        </p:spPr>
+        <p:txBody>
+          <a:bodyPr wrap="square" lIns="0" rIns="0" tIns="0" bIns="0" anchor="t">
+            <a:spAutoFit/>
+          </a:bodyPr>
+          <a:lstStyle/>
+          <a:p>
+            <a:pPr algn="l">
+              <a:lnSpc>
+                <a:spcPct val="120000"/>
+              </a:lnSpc>
+            </a:pPr>
+            <a:r>
+              <a:rPr sz="2025" b="0">
+                <a:solidFill>
+                  <a:srgbClr val="3D3D3D"/>
+                </a:solidFill>
+                <a:latin typeface="Pretendard"/>
+                <a:ea typeface="Pretendard"/>
+                <a:cs typeface="Pretendard"/>
+              </a:rPr>
+              <a:t>Volume lakehouse_minio-data Created · 두 컨테이너 Up</a:t>
+            </a:r>
+          </a:p>
+        </p:txBody>
+      </p:sp>
+      <p:sp>
+        <p:nvSpPr>
+          <p:cNvPr id="28" name="Rounded Rectangle 27"/>
+          <p:cNvSpPr/>
+          <p:nvPr/>
+        </p:nvSpPr>
+        <p:spPr>
+          <a:xfrm>
+            <a:off x="13144500" y="2933700"/>
+            <a:ext cx="4000500" cy="4895850"/>
+          </a:xfrm>
+          <a:prstGeom prst="roundRect">
+            <a:avLst>
+              <a:gd name="adj" fmla="val 1190"/>
             </a:avLst>
           </a:prstGeom>
           <a:solidFill>
@@ -8106,33 +8712,74 @@
       </p:sp>
       <p:sp>
         <p:nvSpPr>
-          <p:cNvPr id="13" name="TextBox 12"/>
-          <p:cNvSpPr txBox="1"/>
-          <p:nvPr/>
-        </p:nvSpPr>
-        <p:spPr>
-          <a:xfrm>
-            <a:off x="1238250" y="3448050"/>
-            <a:ext cx="5532120" cy="445294"/>
-          </a:xfrm>
-          <a:prstGeom prst="rect">
-            <a:avLst/>
-          </a:prstGeom>
-          <a:noFill/>
-        </p:spPr>
-        <p:txBody>
-          <a:bodyPr wrap="square" lIns="0" rIns="0" tIns="0" bIns="0" anchor="ctr">
+          <p:cNvPr id="29" name="TextBox 28"/>
+          <p:cNvSpPr txBox="1"/>
+          <p:nvPr/>
+        </p:nvSpPr>
+        <p:spPr>
+          <a:xfrm>
+            <a:off x="13487400" y="4562475"/>
+            <a:ext cx="3314700" cy="304800"/>
+          </a:xfrm>
+          <a:prstGeom prst="rect">
+            <a:avLst/>
+          </a:prstGeom>
+          <a:noFill/>
+        </p:spPr>
+        <p:txBody>
+          <a:bodyPr wrap="square" lIns="0" rIns="0" tIns="0" bIns="0" anchor="t">
             <a:spAutoFit/>
           </a:bodyPr>
           <a:lstStyle/>
           <a:p>
             <a:pPr algn="l">
               <a:lnSpc>
-                <a:spcPct val="115000"/>
-              </a:lnSpc>
-            </a:pPr>
-            <a:r>
-              <a:rPr sz="1875" b="1">
+                <a:spcPct val="100000"/>
+              </a:lnSpc>
+            </a:pPr>
+            <a:r>
+              <a:rPr sz="1800" b="1" spc="190">
+                <a:solidFill>
+                  <a:srgbClr val="1E5BC6"/>
+                </a:solidFill>
+                <a:latin typeface="Pretendard"/>
+                <a:ea typeface="Pretendard"/>
+                <a:cs typeface="Pretendard"/>
+              </a:rPr>
+              <a:t>minio PORTS</a:t>
+            </a:r>
+          </a:p>
+        </p:txBody>
+      </p:sp>
+      <p:sp>
+        <p:nvSpPr>
+          <p:cNvPr id="30" name="TextBox 29"/>
+          <p:cNvSpPr txBox="1"/>
+          <p:nvPr/>
+        </p:nvSpPr>
+        <p:spPr>
+          <a:xfrm>
+            <a:off x="13487400" y="4962525"/>
+            <a:ext cx="3314700" cy="1238250"/>
+          </a:xfrm>
+          <a:prstGeom prst="rect">
+            <a:avLst/>
+          </a:prstGeom>
+          <a:noFill/>
+        </p:spPr>
+        <p:txBody>
+          <a:bodyPr wrap="square" lIns="0" rIns="0" tIns="0" bIns="0" anchor="t">
+            <a:spAutoFit/>
+          </a:bodyPr>
+          <a:lstStyle/>
+          <a:p>
+            <a:pPr algn="l">
+              <a:lnSpc>
+                <a:spcPct val="138000"/>
+              </a:lnSpc>
+            </a:pPr>
+            <a:r>
+              <a:rPr sz="2700" b="1">
                 <a:solidFill>
                   <a:srgbClr val="0D2B5E"/>
                 </a:solidFill>
@@ -8140,149 +8787,17 @@
                 <a:ea typeface="Pretendard"/>
                 <a:cs typeface="Pretendard"/>
               </a:rPr>
-              <a:t>minio: image</a:t>
-            </a:r>
-          </a:p>
-        </p:txBody>
-      </p:sp>
-      <p:sp>
-        <p:nvSpPr>
-          <p:cNvPr id="14" name="Rounded Rectangle 13"/>
-          <p:cNvSpPr/>
-          <p:nvPr/>
-        </p:nvSpPr>
-        <p:spPr>
-          <a:xfrm>
-            <a:off x="6903720" y="3448050"/>
-            <a:ext cx="10241280" cy="445294"/>
-          </a:xfrm>
-          <a:prstGeom prst="roundRect">
-            <a:avLst>
-              <a:gd name="adj" fmla="val 8556"/>
-            </a:avLst>
-          </a:prstGeom>
-          <a:solidFill>
-            <a:srgbClr val="FAFBFD"/>
-          </a:solidFill>
-          <a:ln w="9525">
-            <a:solidFill>
-              <a:srgbClr val="DCE1E8"/>
-            </a:solidFill>
-          </a:ln>
-          <a:effectLst/>
-        </p:spPr>
-        <p:txBody>
-          <a:bodyPr rtlCol="0" anchor="ctr" wrap="square"/>
-          <a:lstStyle/>
-          <a:p>
-            <a:pPr algn="ctr"/>
-          </a:p>
-        </p:txBody>
-      </p:sp>
-      <p:sp>
-        <p:nvSpPr>
-          <p:cNvPr id="15" name="TextBox 14"/>
-          <p:cNvSpPr txBox="1"/>
-          <p:nvPr/>
-        </p:nvSpPr>
-        <p:spPr>
-          <a:xfrm>
-            <a:off x="6998970" y="3448050"/>
-            <a:ext cx="10050780" cy="445294"/>
-          </a:xfrm>
-          <a:prstGeom prst="rect">
-            <a:avLst/>
-          </a:prstGeom>
-          <a:noFill/>
-        </p:spPr>
-        <p:txBody>
-          <a:bodyPr wrap="square" lIns="0" rIns="0" tIns="0" bIns="0" anchor="ctr">
-            <a:spAutoFit/>
-          </a:bodyPr>
-          <a:lstStyle/>
-          <a:p>
-            <a:pPr algn="ctr">
-              <a:lnSpc>
-                <a:spcPct val="115000"/>
-              </a:lnSpc>
-            </a:pPr>
-            <a:r>
-              <a:rPr sz="1875" b="0">
-                <a:solidFill>
-                  <a:srgbClr val="3D3D3D"/>
-                </a:solidFill>
-                <a:latin typeface="Pretendard"/>
-                <a:ea typeface="Pretendard"/>
-                <a:cs typeface="Pretendard"/>
-              </a:rPr>
-              <a:t>pgsty/minio — 서버</a:t>
-            </a:r>
-          </a:p>
-        </p:txBody>
-      </p:sp>
-      <p:sp>
-        <p:nvSpPr>
-          <p:cNvPr id="16" name="Rounded Rectangle 15"/>
-          <p:cNvSpPr/>
-          <p:nvPr/>
-        </p:nvSpPr>
-        <p:spPr>
-          <a:xfrm>
-            <a:off x="1143000" y="3969544"/>
-            <a:ext cx="5722620" cy="445294"/>
-          </a:xfrm>
-          <a:prstGeom prst="roundRect">
-            <a:avLst>
-              <a:gd name="adj" fmla="val 8556"/>
-            </a:avLst>
-          </a:prstGeom>
-          <a:solidFill>
-            <a:srgbClr val="EDF3FD"/>
-          </a:solidFill>
-          <a:ln w="9525">
-            <a:solidFill>
-              <a:srgbClr val="BFD3F5"/>
-            </a:solidFill>
-          </a:ln>
-          <a:effectLst/>
-        </p:spPr>
-        <p:txBody>
-          <a:bodyPr rtlCol="0" anchor="ctr" wrap="square"/>
-          <a:lstStyle/>
-          <a:p>
-            <a:pPr algn="ctr"/>
-          </a:p>
-        </p:txBody>
-      </p:sp>
-      <p:sp>
-        <p:nvSpPr>
-          <p:cNvPr id="17" name="TextBox 16"/>
-          <p:cNvSpPr txBox="1"/>
-          <p:nvPr/>
-        </p:nvSpPr>
-        <p:spPr>
-          <a:xfrm>
-            <a:off x="1238250" y="3969544"/>
-            <a:ext cx="5532120" cy="445294"/>
-          </a:xfrm>
-          <a:prstGeom prst="rect">
-            <a:avLst/>
-          </a:prstGeom>
-          <a:noFill/>
-        </p:spPr>
-        <p:txBody>
-          <a:bodyPr wrap="square" lIns="0" rIns="0" tIns="0" bIns="0" anchor="ctr">
-            <a:spAutoFit/>
-          </a:bodyPr>
-          <a:lstStyle/>
+              <a:t>0.0.0.0:</a:t>
+            </a:r>
+          </a:p>
           <a:p>
             <a:pPr algn="l">
               <a:lnSpc>
-                <a:spcPct val="115000"/>
-              </a:lnSpc>
-            </a:pPr>
-            <a:r>
-              <a:rPr sz="1875" b="1">
+                <a:spcPct val="138000"/>
+              </a:lnSpc>
+            </a:pPr>
+            <a:r>
+              <a:rPr sz="2700" b="1">
                 <a:solidFill>
                   <a:srgbClr val="0D2B5E"/>
                 </a:solidFill>
@@ -8290,1030 +8805,14 @@
                 <a:ea typeface="Pretendard"/>
                 <a:cs typeface="Pretendard"/>
               </a:rPr>
-              <a:t>ports</a:t>
-            </a:r>
-          </a:p>
-        </p:txBody>
-      </p:sp>
-      <p:sp>
-        <p:nvSpPr>
-          <p:cNvPr id="18" name="Rounded Rectangle 17"/>
-          <p:cNvSpPr/>
-          <p:nvPr/>
-        </p:nvSpPr>
-        <p:spPr>
-          <a:xfrm>
-            <a:off x="6903720" y="3969544"/>
-            <a:ext cx="10241280" cy="445294"/>
-          </a:xfrm>
-          <a:prstGeom prst="roundRect">
-            <a:avLst>
-              <a:gd name="adj" fmla="val 8556"/>
-            </a:avLst>
-          </a:prstGeom>
-          <a:solidFill>
-            <a:srgbClr val="FAFBFD"/>
-          </a:solidFill>
-          <a:ln w="9525">
-            <a:solidFill>
-              <a:srgbClr val="DCE1E8"/>
-            </a:solidFill>
-          </a:ln>
-          <a:effectLst/>
-        </p:spPr>
-        <p:txBody>
-          <a:bodyPr rtlCol="0" anchor="ctr" wrap="square"/>
-          <a:lstStyle/>
-          <a:p>
-            <a:pPr algn="ctr"/>
-          </a:p>
-        </p:txBody>
-      </p:sp>
-      <p:sp>
-        <p:nvSpPr>
-          <p:cNvPr id="19" name="TextBox 18"/>
-          <p:cNvSpPr txBox="1"/>
-          <p:nvPr/>
-        </p:nvSpPr>
-        <p:spPr>
-          <a:xfrm>
-            <a:off x="6998970" y="3969544"/>
-            <a:ext cx="10050780" cy="445294"/>
-          </a:xfrm>
-          <a:prstGeom prst="rect">
-            <a:avLst/>
-          </a:prstGeom>
-          <a:noFill/>
-        </p:spPr>
-        <p:txBody>
-          <a:bodyPr wrap="square" lIns="0" rIns="0" tIns="0" bIns="0" anchor="ctr">
-            <a:spAutoFit/>
-          </a:bodyPr>
-          <a:lstStyle/>
-          <a:p>
-            <a:pPr algn="ctr">
-              <a:lnSpc>
-                <a:spcPct val="115000"/>
-              </a:lnSpc>
-            </a:pPr>
-            <a:r>
-              <a:rPr sz="1875" b="0">
-                <a:solidFill>
-                  <a:srgbClr val="3D3D3D"/>
-                </a:solidFill>
-                <a:latin typeface="Pretendard"/>
-                <a:ea typeface="Pretendard"/>
-                <a:cs typeface="Pretendard"/>
-              </a:rPr>
-              <a:t>9000 S3 API · 9001 웹 콘솔</a:t>
-            </a:r>
-          </a:p>
-        </p:txBody>
-      </p:sp>
-      <p:sp>
-        <p:nvSpPr>
-          <p:cNvPr id="20" name="Rounded Rectangle 19"/>
-          <p:cNvSpPr/>
-          <p:nvPr/>
-        </p:nvSpPr>
-        <p:spPr>
-          <a:xfrm>
-            <a:off x="1143000" y="4491038"/>
-            <a:ext cx="5722620" cy="445294"/>
-          </a:xfrm>
-          <a:prstGeom prst="roundRect">
-            <a:avLst>
-              <a:gd name="adj" fmla="val 8556"/>
-            </a:avLst>
-          </a:prstGeom>
-          <a:solidFill>
-            <a:srgbClr val="EDF3FD"/>
-          </a:solidFill>
-          <a:ln w="9525">
-            <a:solidFill>
-              <a:srgbClr val="BFD3F5"/>
-            </a:solidFill>
-          </a:ln>
-          <a:effectLst/>
-        </p:spPr>
-        <p:txBody>
-          <a:bodyPr rtlCol="0" anchor="ctr" wrap="square"/>
-          <a:lstStyle/>
-          <a:p>
-            <a:pPr algn="ctr"/>
-          </a:p>
-        </p:txBody>
-      </p:sp>
-      <p:sp>
-        <p:nvSpPr>
-          <p:cNvPr id="21" name="TextBox 20"/>
-          <p:cNvSpPr txBox="1"/>
-          <p:nvPr/>
-        </p:nvSpPr>
-        <p:spPr>
-          <a:xfrm>
-            <a:off x="1238250" y="4491038"/>
-            <a:ext cx="5532120" cy="445294"/>
-          </a:xfrm>
-          <a:prstGeom prst="rect">
-            <a:avLst/>
-          </a:prstGeom>
-          <a:noFill/>
-        </p:spPr>
-        <p:txBody>
-          <a:bodyPr wrap="square" lIns="0" rIns="0" tIns="0" bIns="0" anchor="ctr">
-            <a:spAutoFit/>
-          </a:bodyPr>
-          <a:lstStyle/>
-          <a:p>
-            <a:pPr algn="l">
-              <a:lnSpc>
-                <a:spcPct val="115000"/>
-              </a:lnSpc>
-            </a:pPr>
-            <a:r>
-              <a:rPr sz="1875" b="1">
-                <a:solidFill>
-                  <a:srgbClr val="0D2B5E"/>
-                </a:solidFill>
-                <a:latin typeface="Pretendard"/>
-                <a:ea typeface="Pretendard"/>
-                <a:cs typeface="Pretendard"/>
-              </a:rPr>
-              <a:t>environment</a:t>
-            </a:r>
-          </a:p>
-        </p:txBody>
-      </p:sp>
-      <p:sp>
-        <p:nvSpPr>
-          <p:cNvPr id="22" name="Rounded Rectangle 21"/>
-          <p:cNvSpPr/>
-          <p:nvPr/>
-        </p:nvSpPr>
-        <p:spPr>
-          <a:xfrm>
-            <a:off x="6903720" y="4491038"/>
-            <a:ext cx="10241280" cy="445294"/>
-          </a:xfrm>
-          <a:prstGeom prst="roundRect">
-            <a:avLst>
-              <a:gd name="adj" fmla="val 8556"/>
-            </a:avLst>
-          </a:prstGeom>
-          <a:solidFill>
-            <a:srgbClr val="FAFBFD"/>
-          </a:solidFill>
-          <a:ln w="9525">
-            <a:solidFill>
-              <a:srgbClr val="DCE1E8"/>
-            </a:solidFill>
-          </a:ln>
-          <a:effectLst/>
-        </p:spPr>
-        <p:txBody>
-          <a:bodyPr rtlCol="0" anchor="ctr" wrap="square"/>
-          <a:lstStyle/>
-          <a:p>
-            <a:pPr algn="ctr"/>
-          </a:p>
-        </p:txBody>
-      </p:sp>
-      <p:sp>
-        <p:nvSpPr>
-          <p:cNvPr id="23" name="TextBox 22"/>
-          <p:cNvSpPr txBox="1"/>
-          <p:nvPr/>
-        </p:nvSpPr>
-        <p:spPr>
-          <a:xfrm>
-            <a:off x="6998970" y="4491038"/>
-            <a:ext cx="10050780" cy="445294"/>
-          </a:xfrm>
-          <a:prstGeom prst="rect">
-            <a:avLst/>
-          </a:prstGeom>
-          <a:noFill/>
-        </p:spPr>
-        <p:txBody>
-          <a:bodyPr wrap="square" lIns="0" rIns="0" tIns="0" bIns="0" anchor="ctr">
-            <a:spAutoFit/>
-          </a:bodyPr>
-          <a:lstStyle/>
-          <a:p>
-            <a:pPr algn="ctr">
-              <a:lnSpc>
-                <a:spcPct val="115000"/>
-              </a:lnSpc>
-            </a:pPr>
-            <a:r>
-              <a:rPr sz="1875" b="0">
-                <a:solidFill>
-                  <a:srgbClr val="3D3D3D"/>
-                </a:solidFill>
-                <a:latin typeface="Pretendard"/>
-                <a:ea typeface="Pretendard"/>
-                <a:cs typeface="Pretendard"/>
-              </a:rPr>
-              <a:t>루트 계정 minioadmin (실습 전용)</a:t>
-            </a:r>
-          </a:p>
-        </p:txBody>
-      </p:sp>
-      <p:sp>
-        <p:nvSpPr>
-          <p:cNvPr id="24" name="Rounded Rectangle 23"/>
-          <p:cNvSpPr/>
-          <p:nvPr/>
-        </p:nvSpPr>
-        <p:spPr>
-          <a:xfrm>
-            <a:off x="1143000" y="5012531"/>
-            <a:ext cx="5722620" cy="445294"/>
-          </a:xfrm>
-          <a:prstGeom prst="roundRect">
-            <a:avLst>
-              <a:gd name="adj" fmla="val 8556"/>
-            </a:avLst>
-          </a:prstGeom>
-          <a:solidFill>
-            <a:srgbClr val="EDF3FD"/>
-          </a:solidFill>
-          <a:ln w="9525">
-            <a:solidFill>
-              <a:srgbClr val="BFD3F5"/>
-            </a:solidFill>
-          </a:ln>
-          <a:effectLst/>
-        </p:spPr>
-        <p:txBody>
-          <a:bodyPr rtlCol="0" anchor="ctr" wrap="square"/>
-          <a:lstStyle/>
-          <a:p>
-            <a:pPr algn="ctr"/>
-          </a:p>
-        </p:txBody>
-      </p:sp>
-      <p:sp>
-        <p:nvSpPr>
-          <p:cNvPr id="25" name="TextBox 24"/>
-          <p:cNvSpPr txBox="1"/>
-          <p:nvPr/>
-        </p:nvSpPr>
-        <p:spPr>
-          <a:xfrm>
-            <a:off x="1238250" y="5012531"/>
-            <a:ext cx="5532120" cy="445294"/>
-          </a:xfrm>
-          <a:prstGeom prst="rect">
-            <a:avLst/>
-          </a:prstGeom>
-          <a:noFill/>
-        </p:spPr>
-        <p:txBody>
-          <a:bodyPr wrap="square" lIns="0" rIns="0" tIns="0" bIns="0" anchor="ctr">
-            <a:spAutoFit/>
-          </a:bodyPr>
-          <a:lstStyle/>
-          <a:p>
-            <a:pPr algn="l">
-              <a:lnSpc>
-                <a:spcPct val="115000"/>
-              </a:lnSpc>
-            </a:pPr>
-            <a:r>
-              <a:rPr sz="1875" b="1">
-                <a:solidFill>
-                  <a:srgbClr val="0D2B5E"/>
-                </a:solidFill>
-                <a:latin typeface="Pretendard"/>
-                <a:ea typeface="Pretendard"/>
-                <a:cs typeface="Pretendard"/>
-              </a:rPr>
-              <a:t>command</a:t>
-            </a:r>
-          </a:p>
-        </p:txBody>
-      </p:sp>
-      <p:sp>
-        <p:nvSpPr>
-          <p:cNvPr id="26" name="Rounded Rectangle 25"/>
-          <p:cNvSpPr/>
-          <p:nvPr/>
-        </p:nvSpPr>
-        <p:spPr>
-          <a:xfrm>
-            <a:off x="6903720" y="5012531"/>
-            <a:ext cx="10241280" cy="445294"/>
-          </a:xfrm>
-          <a:prstGeom prst="roundRect">
-            <a:avLst>
-              <a:gd name="adj" fmla="val 8556"/>
-            </a:avLst>
-          </a:prstGeom>
-          <a:solidFill>
-            <a:srgbClr val="FAFBFD"/>
-          </a:solidFill>
-          <a:ln w="9525">
-            <a:solidFill>
-              <a:srgbClr val="DCE1E8"/>
-            </a:solidFill>
-          </a:ln>
-          <a:effectLst/>
-        </p:spPr>
-        <p:txBody>
-          <a:bodyPr rtlCol="0" anchor="ctr" wrap="square"/>
-          <a:lstStyle/>
-          <a:p>
-            <a:pPr algn="ctr"/>
-          </a:p>
-        </p:txBody>
-      </p:sp>
-      <p:sp>
-        <p:nvSpPr>
-          <p:cNvPr id="27" name="TextBox 26"/>
-          <p:cNvSpPr txBox="1"/>
-          <p:nvPr/>
-        </p:nvSpPr>
-        <p:spPr>
-          <a:xfrm>
-            <a:off x="6998970" y="5012531"/>
-            <a:ext cx="10050780" cy="445294"/>
-          </a:xfrm>
-          <a:prstGeom prst="rect">
-            <a:avLst/>
-          </a:prstGeom>
-          <a:noFill/>
-        </p:spPr>
-        <p:txBody>
-          <a:bodyPr wrap="square" lIns="0" rIns="0" tIns="0" bIns="0" anchor="ctr">
-            <a:spAutoFit/>
-          </a:bodyPr>
-          <a:lstStyle/>
-          <a:p>
-            <a:pPr algn="ctr">
-              <a:lnSpc>
-                <a:spcPct val="115000"/>
-              </a:lnSpc>
-            </a:pPr>
-            <a:r>
-              <a:rPr sz="1875" b="0">
-                <a:solidFill>
-                  <a:srgbClr val="3D3D3D"/>
-                </a:solidFill>
-                <a:latin typeface="Pretendard"/>
-                <a:ea typeface="Pretendard"/>
-                <a:cs typeface="Pretendard"/>
-              </a:rPr>
-              <a:t>server /data 콘솔 :9001</a:t>
-            </a:r>
-          </a:p>
-        </p:txBody>
-      </p:sp>
-      <p:sp>
-        <p:nvSpPr>
-          <p:cNvPr id="28" name="Rounded Rectangle 27"/>
-          <p:cNvSpPr/>
-          <p:nvPr/>
-        </p:nvSpPr>
-        <p:spPr>
-          <a:xfrm>
-            <a:off x="1143000" y="5534025"/>
-            <a:ext cx="5722620" cy="445294"/>
-          </a:xfrm>
-          <a:prstGeom prst="roundRect">
-            <a:avLst>
-              <a:gd name="adj" fmla="val 8556"/>
-            </a:avLst>
-          </a:prstGeom>
-          <a:solidFill>
-            <a:srgbClr val="EDF3FD"/>
-          </a:solidFill>
-          <a:ln w="9525">
-            <a:solidFill>
-              <a:srgbClr val="BFD3F5"/>
-            </a:solidFill>
-          </a:ln>
-          <a:effectLst/>
-        </p:spPr>
-        <p:txBody>
-          <a:bodyPr rtlCol="0" anchor="ctr" wrap="square"/>
-          <a:lstStyle/>
-          <a:p>
-            <a:pPr algn="ctr"/>
-          </a:p>
-        </p:txBody>
-      </p:sp>
-      <p:sp>
-        <p:nvSpPr>
-          <p:cNvPr id="29" name="TextBox 28"/>
-          <p:cNvSpPr txBox="1"/>
-          <p:nvPr/>
-        </p:nvSpPr>
-        <p:spPr>
-          <a:xfrm>
-            <a:off x="1238250" y="5534025"/>
-            <a:ext cx="5532120" cy="445294"/>
-          </a:xfrm>
-          <a:prstGeom prst="rect">
-            <a:avLst/>
-          </a:prstGeom>
-          <a:noFill/>
-        </p:spPr>
-        <p:txBody>
-          <a:bodyPr wrap="square" lIns="0" rIns="0" tIns="0" bIns="0" anchor="ctr">
-            <a:spAutoFit/>
-          </a:bodyPr>
-          <a:lstStyle/>
-          <a:p>
-            <a:pPr algn="l">
-              <a:lnSpc>
-                <a:spcPct val="115000"/>
-              </a:lnSpc>
-            </a:pPr>
-            <a:r>
-              <a:rPr sz="1875" b="1">
-                <a:solidFill>
-                  <a:srgbClr val="0D2B5E"/>
-                </a:solidFill>
-                <a:latin typeface="Pretendard"/>
-                <a:ea typeface="Pretendard"/>
-                <a:cs typeface="Pretendard"/>
-              </a:rPr>
-              <a:t>volumes minio-data</a:t>
-            </a:r>
-          </a:p>
-        </p:txBody>
-      </p:sp>
-      <p:sp>
-        <p:nvSpPr>
-          <p:cNvPr id="30" name="Rounded Rectangle 29"/>
-          <p:cNvSpPr/>
-          <p:nvPr/>
-        </p:nvSpPr>
-        <p:spPr>
-          <a:xfrm>
-            <a:off x="6903720" y="5534025"/>
-            <a:ext cx="10241280" cy="445294"/>
-          </a:xfrm>
-          <a:prstGeom prst="roundRect">
-            <a:avLst>
-              <a:gd name="adj" fmla="val 8556"/>
-            </a:avLst>
-          </a:prstGeom>
-          <a:solidFill>
-            <a:srgbClr val="FAFBFD"/>
-          </a:solidFill>
-          <a:ln w="9525">
-            <a:solidFill>
-              <a:srgbClr val="DCE1E8"/>
-            </a:solidFill>
-          </a:ln>
-          <a:effectLst/>
-        </p:spPr>
-        <p:txBody>
-          <a:bodyPr rtlCol="0" anchor="ctr" wrap="square"/>
-          <a:lstStyle/>
-          <a:p>
-            <a:pPr algn="ctr"/>
-          </a:p>
-        </p:txBody>
-      </p:sp>
-      <p:sp>
-        <p:nvSpPr>
-          <p:cNvPr id="31" name="TextBox 30"/>
-          <p:cNvSpPr txBox="1"/>
-          <p:nvPr/>
-        </p:nvSpPr>
-        <p:spPr>
-          <a:xfrm>
-            <a:off x="6998970" y="5534025"/>
-            <a:ext cx="10050780" cy="445294"/>
-          </a:xfrm>
-          <a:prstGeom prst="rect">
-            <a:avLst/>
-          </a:prstGeom>
-          <a:noFill/>
-        </p:spPr>
-        <p:txBody>
-          <a:bodyPr wrap="square" lIns="0" rIns="0" tIns="0" bIns="0" anchor="ctr">
-            <a:spAutoFit/>
-          </a:bodyPr>
-          <a:lstStyle/>
-          <a:p>
-            <a:pPr algn="ctr">
-              <a:lnSpc>
-                <a:spcPct val="115000"/>
-              </a:lnSpc>
-            </a:pPr>
-            <a:r>
-              <a:rPr sz="1875" b="0">
-                <a:solidFill>
-                  <a:srgbClr val="3D3D3D"/>
-                </a:solidFill>
-                <a:latin typeface="Pretendard"/>
-                <a:ea typeface="Pretendard"/>
-                <a:cs typeface="Pretendard"/>
-              </a:rPr>
-              <a:t>이름 볼륨 — 지워도 데이터가 남는다</a:t>
-            </a:r>
-          </a:p>
-        </p:txBody>
-      </p:sp>
-      <p:sp>
-        <p:nvSpPr>
-          <p:cNvPr id="32" name="Rounded Rectangle 31"/>
-          <p:cNvSpPr/>
-          <p:nvPr/>
-        </p:nvSpPr>
-        <p:spPr>
-          <a:xfrm>
-            <a:off x="1143000" y="6055519"/>
-            <a:ext cx="5722620" cy="445294"/>
-          </a:xfrm>
-          <a:prstGeom prst="roundRect">
-            <a:avLst>
-              <a:gd name="adj" fmla="val 8556"/>
-            </a:avLst>
-          </a:prstGeom>
-          <a:solidFill>
-            <a:srgbClr val="EDF3FD"/>
-          </a:solidFill>
-          <a:ln w="9525">
-            <a:solidFill>
-              <a:srgbClr val="BFD3F5"/>
-            </a:solidFill>
-          </a:ln>
-          <a:effectLst/>
-        </p:spPr>
-        <p:txBody>
-          <a:bodyPr rtlCol="0" anchor="ctr" wrap="square"/>
-          <a:lstStyle/>
-          <a:p>
-            <a:pPr algn="ctr"/>
-          </a:p>
-        </p:txBody>
-      </p:sp>
-      <p:sp>
-        <p:nvSpPr>
-          <p:cNvPr id="33" name="TextBox 32"/>
-          <p:cNvSpPr txBox="1"/>
-          <p:nvPr/>
-        </p:nvSpPr>
-        <p:spPr>
-          <a:xfrm>
-            <a:off x="1238250" y="6055519"/>
-            <a:ext cx="5532120" cy="445294"/>
-          </a:xfrm>
-          <a:prstGeom prst="rect">
-            <a:avLst/>
-          </a:prstGeom>
-          <a:noFill/>
-        </p:spPr>
-        <p:txBody>
-          <a:bodyPr wrap="square" lIns="0" rIns="0" tIns="0" bIns="0" anchor="ctr">
-            <a:spAutoFit/>
-          </a:bodyPr>
-          <a:lstStyle/>
-          <a:p>
-            <a:pPr algn="l">
-              <a:lnSpc>
-                <a:spcPct val="115000"/>
-              </a:lnSpc>
-            </a:pPr>
-            <a:r>
-              <a:rPr sz="1875" b="1">
-                <a:solidFill>
-                  <a:srgbClr val="0D2B5E"/>
-                </a:solidFill>
-                <a:latin typeface="Pretendard"/>
-                <a:ea typeface="Pretendard"/>
-                <a:cs typeface="Pretendard"/>
-              </a:rPr>
-              <a:t>mc: image</a:t>
-            </a:r>
-          </a:p>
-        </p:txBody>
-      </p:sp>
-      <p:sp>
-        <p:nvSpPr>
-          <p:cNvPr id="34" name="Rounded Rectangle 33"/>
-          <p:cNvSpPr/>
-          <p:nvPr/>
-        </p:nvSpPr>
-        <p:spPr>
-          <a:xfrm>
-            <a:off x="6903720" y="6055519"/>
-            <a:ext cx="10241280" cy="445294"/>
-          </a:xfrm>
-          <a:prstGeom prst="roundRect">
-            <a:avLst>
-              <a:gd name="adj" fmla="val 8556"/>
-            </a:avLst>
-          </a:prstGeom>
-          <a:solidFill>
-            <a:srgbClr val="FAFBFD"/>
-          </a:solidFill>
-          <a:ln w="9525">
-            <a:solidFill>
-              <a:srgbClr val="DCE1E8"/>
-            </a:solidFill>
-          </a:ln>
-          <a:effectLst/>
-        </p:spPr>
-        <p:txBody>
-          <a:bodyPr rtlCol="0" anchor="ctr" wrap="square"/>
-          <a:lstStyle/>
-          <a:p>
-            <a:pPr algn="ctr"/>
-          </a:p>
-        </p:txBody>
-      </p:sp>
-      <p:sp>
-        <p:nvSpPr>
-          <p:cNvPr id="35" name="TextBox 34"/>
-          <p:cNvSpPr txBox="1"/>
-          <p:nvPr/>
-        </p:nvSpPr>
-        <p:spPr>
-          <a:xfrm>
-            <a:off x="6998970" y="6055519"/>
-            <a:ext cx="10050780" cy="445294"/>
-          </a:xfrm>
-          <a:prstGeom prst="rect">
-            <a:avLst/>
-          </a:prstGeom>
-          <a:noFill/>
-        </p:spPr>
-        <p:txBody>
-          <a:bodyPr wrap="square" lIns="0" rIns="0" tIns="0" bIns="0" anchor="ctr">
-            <a:spAutoFit/>
-          </a:bodyPr>
-          <a:lstStyle/>
-          <a:p>
-            <a:pPr algn="ctr">
-              <a:lnSpc>
-                <a:spcPct val="115000"/>
-              </a:lnSpc>
-            </a:pPr>
-            <a:r>
-              <a:rPr sz="1875" b="0">
-                <a:solidFill>
-                  <a:srgbClr val="3D3D3D"/>
-                </a:solidFill>
-                <a:latin typeface="Pretendard"/>
-                <a:ea typeface="Pretendard"/>
-                <a:cs typeface="Pretendard"/>
-              </a:rPr>
-              <a:t>pgsty/mc — 클라이언트</a:t>
-            </a:r>
-          </a:p>
-        </p:txBody>
-      </p:sp>
-      <p:sp>
-        <p:nvSpPr>
-          <p:cNvPr id="36" name="Rounded Rectangle 35"/>
-          <p:cNvSpPr/>
-          <p:nvPr/>
-        </p:nvSpPr>
-        <p:spPr>
-          <a:xfrm>
-            <a:off x="1143000" y="6577012"/>
-            <a:ext cx="5722620" cy="445294"/>
-          </a:xfrm>
-          <a:prstGeom prst="roundRect">
-            <a:avLst>
-              <a:gd name="adj" fmla="val 8556"/>
-            </a:avLst>
-          </a:prstGeom>
-          <a:solidFill>
-            <a:srgbClr val="EDF3FD"/>
-          </a:solidFill>
-          <a:ln w="9525">
-            <a:solidFill>
-              <a:srgbClr val="BFD3F5"/>
-            </a:solidFill>
-          </a:ln>
-          <a:effectLst/>
-        </p:spPr>
-        <p:txBody>
-          <a:bodyPr rtlCol="0" anchor="ctr" wrap="square"/>
-          <a:lstStyle/>
-          <a:p>
-            <a:pPr algn="ctr"/>
-          </a:p>
-        </p:txBody>
-      </p:sp>
-      <p:sp>
-        <p:nvSpPr>
-          <p:cNvPr id="37" name="TextBox 36"/>
-          <p:cNvSpPr txBox="1"/>
-          <p:nvPr/>
-        </p:nvSpPr>
-        <p:spPr>
-          <a:xfrm>
-            <a:off x="1238250" y="6577012"/>
-            <a:ext cx="5532120" cy="445294"/>
-          </a:xfrm>
-          <a:prstGeom prst="rect">
-            <a:avLst/>
-          </a:prstGeom>
-          <a:noFill/>
-        </p:spPr>
-        <p:txBody>
-          <a:bodyPr wrap="square" lIns="0" rIns="0" tIns="0" bIns="0" anchor="ctr">
-            <a:spAutoFit/>
-          </a:bodyPr>
-          <a:lstStyle/>
-          <a:p>
-            <a:pPr algn="l">
-              <a:lnSpc>
-                <a:spcPct val="115000"/>
-              </a:lnSpc>
-            </a:pPr>
-            <a:r>
-              <a:rPr sz="1875" b="1">
-                <a:solidFill>
-                  <a:srgbClr val="0D2B5E"/>
-                </a:solidFill>
-                <a:latin typeface="Pretendard"/>
-                <a:ea typeface="Pretendard"/>
-                <a:cs typeface="Pretendard"/>
-              </a:rPr>
-              <a:t>mc: entrypoint</a:t>
-            </a:r>
-          </a:p>
-        </p:txBody>
-      </p:sp>
-      <p:sp>
-        <p:nvSpPr>
-          <p:cNvPr id="38" name="Rounded Rectangle 37"/>
-          <p:cNvSpPr/>
-          <p:nvPr/>
-        </p:nvSpPr>
-        <p:spPr>
-          <a:xfrm>
-            <a:off x="6903720" y="6577012"/>
-            <a:ext cx="10241280" cy="445294"/>
-          </a:xfrm>
-          <a:prstGeom prst="roundRect">
-            <a:avLst>
-              <a:gd name="adj" fmla="val 8556"/>
-            </a:avLst>
-          </a:prstGeom>
-          <a:solidFill>
-            <a:srgbClr val="FAFBFD"/>
-          </a:solidFill>
-          <a:ln w="9525">
-            <a:solidFill>
-              <a:srgbClr val="DCE1E8"/>
-            </a:solidFill>
-          </a:ln>
-          <a:effectLst/>
-        </p:spPr>
-        <p:txBody>
-          <a:bodyPr rtlCol="0" anchor="ctr" wrap="square"/>
-          <a:lstStyle/>
-          <a:p>
-            <a:pPr algn="ctr"/>
-          </a:p>
-        </p:txBody>
-      </p:sp>
-      <p:sp>
-        <p:nvSpPr>
-          <p:cNvPr id="39" name="TextBox 38"/>
-          <p:cNvSpPr txBox="1"/>
-          <p:nvPr/>
-        </p:nvSpPr>
-        <p:spPr>
-          <a:xfrm>
-            <a:off x="6998970" y="6577012"/>
-            <a:ext cx="10050780" cy="445294"/>
-          </a:xfrm>
-          <a:prstGeom prst="rect">
-            <a:avLst/>
-          </a:prstGeom>
-          <a:noFill/>
-        </p:spPr>
-        <p:txBody>
-          <a:bodyPr wrap="square" lIns="0" rIns="0" tIns="0" bIns="0" anchor="ctr">
-            <a:spAutoFit/>
-          </a:bodyPr>
-          <a:lstStyle/>
-          <a:p>
-            <a:pPr algn="ctr">
-              <a:lnSpc>
-                <a:spcPct val="115000"/>
-              </a:lnSpc>
-            </a:pPr>
-            <a:r>
-              <a:rPr sz="1875" b="0">
-                <a:solidFill>
-                  <a:srgbClr val="3D3D3D"/>
-                </a:solidFill>
-                <a:latin typeface="Pretendard"/>
-                <a:ea typeface="Pretendard"/>
-                <a:cs typeface="Pretendard"/>
-              </a:rPr>
-              <a:t>sleep infinity — 계속 떠 있게</a:t>
-            </a:r>
-          </a:p>
-        </p:txBody>
-      </p:sp>
-      <p:sp>
-        <p:nvSpPr>
-          <p:cNvPr id="40" name="Rounded Rectangle 39"/>
-          <p:cNvSpPr/>
-          <p:nvPr/>
-        </p:nvSpPr>
-        <p:spPr>
-          <a:xfrm>
-            <a:off x="1143000" y="7098506"/>
-            <a:ext cx="5722620" cy="445294"/>
-          </a:xfrm>
-          <a:prstGeom prst="roundRect">
-            <a:avLst>
-              <a:gd name="adj" fmla="val 8556"/>
-            </a:avLst>
-          </a:prstGeom>
-          <a:solidFill>
-            <a:srgbClr val="EDF3FD"/>
-          </a:solidFill>
-          <a:ln w="9525">
-            <a:solidFill>
-              <a:srgbClr val="BFD3F5"/>
-            </a:solidFill>
-          </a:ln>
-          <a:effectLst/>
-        </p:spPr>
-        <p:txBody>
-          <a:bodyPr rtlCol="0" anchor="ctr" wrap="square"/>
-          <a:lstStyle/>
-          <a:p>
-            <a:pPr algn="ctr"/>
-          </a:p>
-        </p:txBody>
-      </p:sp>
-      <p:sp>
-        <p:nvSpPr>
-          <p:cNvPr id="41" name="TextBox 40"/>
-          <p:cNvSpPr txBox="1"/>
-          <p:nvPr/>
-        </p:nvSpPr>
-        <p:spPr>
-          <a:xfrm>
-            <a:off x="1238250" y="7098506"/>
-            <a:ext cx="5532120" cy="445294"/>
-          </a:xfrm>
-          <a:prstGeom prst="rect">
-            <a:avLst/>
-          </a:prstGeom>
-          <a:noFill/>
-        </p:spPr>
-        <p:txBody>
-          <a:bodyPr wrap="square" lIns="0" rIns="0" tIns="0" bIns="0" anchor="ctr">
-            <a:spAutoFit/>
-          </a:bodyPr>
-          <a:lstStyle/>
-          <a:p>
-            <a:pPr algn="l">
-              <a:lnSpc>
-                <a:spcPct val="115000"/>
-              </a:lnSpc>
-            </a:pPr>
-            <a:r>
-              <a:rPr sz="1875" b="1">
-                <a:solidFill>
-                  <a:srgbClr val="0D2B5E"/>
-                </a:solidFill>
-                <a:latin typeface="Pretendard"/>
-                <a:ea typeface="Pretendard"/>
-                <a:cs typeface="Pretendard"/>
-              </a:rPr>
-              <a:t>mc: volumes</a:t>
-            </a:r>
-          </a:p>
-        </p:txBody>
-      </p:sp>
-      <p:sp>
-        <p:nvSpPr>
-          <p:cNvPr id="42" name="Rounded Rectangle 41"/>
-          <p:cNvSpPr/>
-          <p:nvPr/>
-        </p:nvSpPr>
-        <p:spPr>
-          <a:xfrm>
-            <a:off x="6903720" y="7098506"/>
-            <a:ext cx="10241280" cy="445294"/>
-          </a:xfrm>
-          <a:prstGeom prst="roundRect">
-            <a:avLst>
-              <a:gd name="adj" fmla="val 8556"/>
-            </a:avLst>
-          </a:prstGeom>
-          <a:solidFill>
-            <a:srgbClr val="FAFBFD"/>
-          </a:solidFill>
-          <a:ln w="9525">
-            <a:solidFill>
-              <a:srgbClr val="DCE1E8"/>
-            </a:solidFill>
-          </a:ln>
-          <a:effectLst/>
-        </p:spPr>
-        <p:txBody>
-          <a:bodyPr rtlCol="0" anchor="ctr" wrap="square"/>
-          <a:lstStyle/>
-          <a:p>
-            <a:pPr algn="ctr"/>
-          </a:p>
-        </p:txBody>
-      </p:sp>
-      <p:sp>
-        <p:nvSpPr>
-          <p:cNvPr id="43" name="TextBox 42"/>
-          <p:cNvSpPr txBox="1"/>
-          <p:nvPr/>
-        </p:nvSpPr>
-        <p:spPr>
-          <a:xfrm>
-            <a:off x="6998970" y="7098506"/>
-            <a:ext cx="10050780" cy="445294"/>
-          </a:xfrm>
-          <a:prstGeom prst="rect">
-            <a:avLst/>
-          </a:prstGeom>
-          <a:noFill/>
-        </p:spPr>
-        <p:txBody>
-          <a:bodyPr wrap="square" lIns="0" rIns="0" tIns="0" bIns="0" anchor="ctr">
-            <a:spAutoFit/>
-          </a:bodyPr>
-          <a:lstStyle/>
-          <a:p>
-            <a:pPr algn="ctr">
-              <a:lnSpc>
-                <a:spcPct val="115000"/>
-              </a:lnSpc>
-            </a:pPr>
-            <a:r>
-              <a:rPr sz="1875" b="0">
-                <a:solidFill>
-                  <a:srgbClr val="3D3D3D"/>
-                </a:solidFill>
-                <a:latin typeface="Pretendard"/>
-                <a:ea typeface="Pretendard"/>
-                <a:cs typeface="Pretendard"/>
-              </a:rPr>
-              <a:t>./data:/data — 호스트 폴더 마운트</a:t>
-            </a:r>
-          </a:p>
-        </p:txBody>
-      </p:sp>
-      <p:sp>
-        <p:nvSpPr>
-          <p:cNvPr id="44" name="TextBox 43"/>
-          <p:cNvSpPr txBox="1"/>
-          <p:nvPr/>
-        </p:nvSpPr>
-        <p:spPr>
-          <a:xfrm>
-            <a:off x="1143000" y="7620000"/>
-            <a:ext cx="16002000" cy="342900"/>
-          </a:xfrm>
-          <a:prstGeom prst="rect">
-            <a:avLst/>
-          </a:prstGeom>
-          <a:noFill/>
-        </p:spPr>
-        <p:txBody>
-          <a:bodyPr wrap="square" lIns="0" rIns="0" tIns="0" bIns="0" anchor="t">
-            <a:spAutoFit/>
-          </a:bodyPr>
-          <a:lstStyle/>
-          <a:p>
-            <a:pPr algn="l">
-              <a:lnSpc>
-                <a:spcPct val="100000"/>
-              </a:lnSpc>
-            </a:pPr>
-            <a:r>
-              <a:rPr sz="1875" b="1">
-                <a:solidFill>
-                  <a:srgbClr val="7D7D7D"/>
-                </a:solidFill>
-                <a:latin typeface="Pretendard"/>
-                <a:ea typeface="Pretendard"/>
-                <a:cs typeface="Pretendard"/>
-              </a:rPr>
-              <a:t>mc 는 명령만 실행하고 끝나는 이미지 — sleep infinity 로 계속 떠 있게 만드는 흔한 수법</a:t>
-            </a:r>
-          </a:p>
-        </p:txBody>
-      </p:sp>
-      <p:sp>
-        <p:nvSpPr>
-          <p:cNvPr id="45" name="Rectangle 44"/>
+              <a:t>9000-9001</a:t>
+            </a:r>
+          </a:p>
+        </p:txBody>
+      </p:sp>
+      <p:sp>
+        <p:nvSpPr>
+          <p:cNvPr id="31" name="Rectangle 30"/>
           <p:cNvSpPr/>
           <p:nvPr/>
         </p:nvSpPr>
@@ -9343,7 +8842,7 @@
       </p:sp>
       <p:sp>
         <p:nvSpPr>
-          <p:cNvPr id="46" name="TextBox 45"/>
+          <p:cNvPr id="32" name="TextBox 31"/>
           <p:cNvSpPr txBox="1"/>
           <p:nvPr/>
         </p:nvSpPr>
@@ -9384,7 +8883,7 @@
       </p:sp>
       <p:sp>
         <p:nvSpPr>
-          <p:cNvPr id="47" name="TextBox 46"/>
+          <p:cNvPr id="33" name="TextBox 32"/>
           <p:cNvSpPr txBox="1"/>
           <p:nvPr/>
         </p:nvSpPr>
@@ -9608,7 +9107,7 @@
                 <a:ea typeface="Pretendard"/>
                 <a:cs typeface="Pretendard"/>
               </a:rPr>
-              <a:t>핵심 명령 — 만들고 · 검증 · 띄우고 · 확인</a:t>
+              <a:t>docker-compose.yml — 설정 한 줄씩 뜻</a:t>
             </a:r>
           </a:p>
         </p:txBody>
@@ -9652,7 +9151,7 @@
         <p:spPr>
           <a:xfrm>
             <a:off x="1143000" y="2781300"/>
-            <a:ext cx="738021" cy="571500"/>
+            <a:ext cx="5722620" cy="590550"/>
           </a:xfrm>
           <a:prstGeom prst="rect">
             <a:avLst/>
@@ -9682,7 +9181,7 @@
         <p:spPr>
           <a:xfrm>
             <a:off x="1143000" y="2781300"/>
-            <a:ext cx="738021" cy="571500"/>
+            <a:ext cx="5722620" cy="590550"/>
           </a:xfrm>
           <a:prstGeom prst="rect">
             <a:avLst/>
@@ -9701,7 +9200,7 @@
               </a:lnSpc>
             </a:pPr>
             <a:r>
-              <a:rPr sz="1800" b="1">
+              <a:rPr sz="2025" b="1">
                 <a:solidFill>
                   <a:srgbClr val="FFFFFF"/>
                 </a:solidFill>
@@ -9709,7 +9208,7 @@
                 <a:ea typeface="Pretendard"/>
                 <a:cs typeface="Pretendard"/>
               </a:rPr>
-              <a:t>폴더</a:t>
+              <a:t>설정</a:t>
             </a:r>
           </a:p>
         </p:txBody>
@@ -9722,11 +9221,159 @@
         </p:nvSpPr>
         <p:spPr>
           <a:xfrm>
-            <a:off x="1881021" y="2781300"/>
-            <a:ext cx="15263979" cy="571500"/>
-          </a:xfrm>
-          <a:prstGeom prst="rect">
-            <a:avLst/>
+            <a:off x="6903720" y="2781300"/>
+            <a:ext cx="10241280" cy="590550"/>
+          </a:xfrm>
+          <a:prstGeom prst="rect">
+            <a:avLst/>
+          </a:prstGeom>
+          <a:solidFill>
+            <a:srgbClr val="1E5BC6"/>
+          </a:solidFill>
+          <a:ln>
+            <a:noFill/>
+          </a:ln>
+          <a:effectLst/>
+        </p:spPr>
+        <p:txBody>
+          <a:bodyPr rtlCol="0" anchor="ctr" wrap="square"/>
+          <a:lstStyle/>
+          <a:p>
+            <a:pPr algn="ctr"/>
+          </a:p>
+        </p:txBody>
+      </p:sp>
+      <p:sp>
+        <p:nvSpPr>
+          <p:cNvPr id="11" name="TextBox 10"/>
+          <p:cNvSpPr txBox="1"/>
+          <p:nvPr/>
+        </p:nvSpPr>
+        <p:spPr>
+          <a:xfrm>
+            <a:off x="6903720" y="2781300"/>
+            <a:ext cx="10241280" cy="590550"/>
+          </a:xfrm>
+          <a:prstGeom prst="rect">
+            <a:avLst/>
+          </a:prstGeom>
+          <a:noFill/>
+        </p:spPr>
+        <p:txBody>
+          <a:bodyPr wrap="square" lIns="0" rIns="0" tIns="0" bIns="0" anchor="ctr">
+            <a:spAutoFit/>
+          </a:bodyPr>
+          <a:lstStyle/>
+          <a:p>
+            <a:pPr algn="ctr">
+              <a:lnSpc>
+                <a:spcPct val="100000"/>
+              </a:lnSpc>
+            </a:pPr>
+            <a:r>
+              <a:rPr sz="2025" b="1">
+                <a:solidFill>
+                  <a:srgbClr val="FFFFFF"/>
+                </a:solidFill>
+                <a:latin typeface="Pretendard"/>
+                <a:ea typeface="Pretendard"/>
+                <a:cs typeface="Pretendard"/>
+              </a:rPr>
+              <a:t>뜻</a:t>
+            </a:r>
+          </a:p>
+        </p:txBody>
+      </p:sp>
+      <p:sp>
+        <p:nvSpPr>
+          <p:cNvPr id="12" name="Rounded Rectangle 11"/>
+          <p:cNvSpPr/>
+          <p:nvPr/>
+        </p:nvSpPr>
+        <p:spPr>
+          <a:xfrm>
+            <a:off x="1143000" y="3448050"/>
+            <a:ext cx="5722620" cy="445294"/>
+          </a:xfrm>
+          <a:prstGeom prst="roundRect">
+            <a:avLst>
+              <a:gd name="adj" fmla="val 8556"/>
+            </a:avLst>
+          </a:prstGeom>
+          <a:solidFill>
+            <a:srgbClr val="EDF3FD"/>
+          </a:solidFill>
+          <a:ln w="9525">
+            <a:solidFill>
+              <a:srgbClr val="BFD3F5"/>
+            </a:solidFill>
+          </a:ln>
+          <a:effectLst/>
+        </p:spPr>
+        <p:txBody>
+          <a:bodyPr rtlCol="0" anchor="ctr" wrap="square"/>
+          <a:lstStyle/>
+          <a:p>
+            <a:pPr algn="ctr"/>
+          </a:p>
+        </p:txBody>
+      </p:sp>
+      <p:sp>
+        <p:nvSpPr>
+          <p:cNvPr id="13" name="TextBox 12"/>
+          <p:cNvSpPr txBox="1"/>
+          <p:nvPr/>
+        </p:nvSpPr>
+        <p:spPr>
+          <a:xfrm>
+            <a:off x="1238250" y="3448050"/>
+            <a:ext cx="5532120" cy="445294"/>
+          </a:xfrm>
+          <a:prstGeom prst="rect">
+            <a:avLst/>
+          </a:prstGeom>
+          <a:noFill/>
+        </p:spPr>
+        <p:txBody>
+          <a:bodyPr wrap="square" lIns="0" rIns="0" tIns="0" bIns="0" anchor="ctr">
+            <a:spAutoFit/>
+          </a:bodyPr>
+          <a:lstStyle/>
+          <a:p>
+            <a:pPr algn="l">
+              <a:lnSpc>
+                <a:spcPct val="115000"/>
+              </a:lnSpc>
+            </a:pPr>
+            <a:r>
+              <a:rPr sz="1875" b="1">
+                <a:solidFill>
+                  <a:srgbClr val="0D2B5E"/>
+                </a:solidFill>
+                <a:latin typeface="Pretendard"/>
+                <a:ea typeface="Pretendard"/>
+                <a:cs typeface="Pretendard"/>
+              </a:rPr>
+              <a:t>minio: image</a:t>
+            </a:r>
+          </a:p>
+        </p:txBody>
+      </p:sp>
+      <p:sp>
+        <p:nvSpPr>
+          <p:cNvPr id="14" name="Rounded Rectangle 13"/>
+          <p:cNvSpPr/>
+          <p:nvPr/>
+        </p:nvSpPr>
+        <p:spPr>
+          <a:xfrm>
+            <a:off x="6903720" y="3448050"/>
+            <a:ext cx="10241280" cy="445294"/>
+          </a:xfrm>
+          <a:prstGeom prst="roundRect">
+            <a:avLst>
+              <a:gd name="adj" fmla="val 8556"/>
+            </a:avLst>
           </a:prstGeom>
           <a:solidFill>
             <a:srgbClr val="FAFBFD"/>
@@ -9748,14 +9395,14 @@
       </p:sp>
       <p:sp>
         <p:nvSpPr>
-          <p:cNvPr id="11" name="TextBox 10"/>
-          <p:cNvSpPr txBox="1"/>
-          <p:nvPr/>
-        </p:nvSpPr>
-        <p:spPr>
-          <a:xfrm>
-            <a:off x="2033421" y="2781300"/>
-            <a:ext cx="14959179" cy="571500"/>
+          <p:cNvPr id="15" name="TextBox 14"/>
+          <p:cNvSpPr txBox="1"/>
+          <p:nvPr/>
+        </p:nvSpPr>
+        <p:spPr>
+          <a:xfrm>
+            <a:off x="6998970" y="3448050"/>
+            <a:ext cx="10050780" cy="445294"/>
           </a:xfrm>
           <a:prstGeom prst="rect">
             <a:avLst/>
@@ -9768,109 +9415,115 @@
           </a:bodyPr>
           <a:lstStyle/>
           <a:p>
+            <a:pPr algn="ctr">
+              <a:lnSpc>
+                <a:spcPct val="115000"/>
+              </a:lnSpc>
+            </a:pPr>
+            <a:r>
+              <a:rPr sz="1875" b="0">
+                <a:solidFill>
+                  <a:srgbClr val="3D3D3D"/>
+                </a:solidFill>
+                <a:latin typeface="Pretendard"/>
+                <a:ea typeface="Pretendard"/>
+                <a:cs typeface="Pretendard"/>
+              </a:rPr>
+              <a:t>pgsty/minio — 서버</a:t>
+            </a:r>
+          </a:p>
+        </p:txBody>
+      </p:sp>
+      <p:sp>
+        <p:nvSpPr>
+          <p:cNvPr id="16" name="Rounded Rectangle 15"/>
+          <p:cNvSpPr/>
+          <p:nvPr/>
+        </p:nvSpPr>
+        <p:spPr>
+          <a:xfrm>
+            <a:off x="1143000" y="3969544"/>
+            <a:ext cx="5722620" cy="445294"/>
+          </a:xfrm>
+          <a:prstGeom prst="roundRect">
+            <a:avLst>
+              <a:gd name="adj" fmla="val 8556"/>
+            </a:avLst>
+          </a:prstGeom>
+          <a:solidFill>
+            <a:srgbClr val="EDF3FD"/>
+          </a:solidFill>
+          <a:ln w="9525">
+            <a:solidFill>
+              <a:srgbClr val="BFD3F5"/>
+            </a:solidFill>
+          </a:ln>
+          <a:effectLst/>
+        </p:spPr>
+        <p:txBody>
+          <a:bodyPr rtlCol="0" anchor="ctr" wrap="square"/>
+          <a:lstStyle/>
+          <a:p>
+            <a:pPr algn="ctr"/>
+          </a:p>
+        </p:txBody>
+      </p:sp>
+      <p:sp>
+        <p:nvSpPr>
+          <p:cNvPr id="17" name="TextBox 16"/>
+          <p:cNvSpPr txBox="1"/>
+          <p:nvPr/>
+        </p:nvSpPr>
+        <p:spPr>
+          <a:xfrm>
+            <a:off x="1238250" y="3969544"/>
+            <a:ext cx="5532120" cy="445294"/>
+          </a:xfrm>
+          <a:prstGeom prst="rect">
+            <a:avLst/>
+          </a:prstGeom>
+          <a:noFill/>
+        </p:spPr>
+        <p:txBody>
+          <a:bodyPr wrap="square" lIns="0" rIns="0" tIns="0" bIns="0" anchor="ctr">
+            <a:spAutoFit/>
+          </a:bodyPr>
+          <a:lstStyle/>
+          <a:p>
             <a:pPr algn="l">
               <a:lnSpc>
                 <a:spcPct val="115000"/>
               </a:lnSpc>
             </a:pPr>
             <a:r>
-              <a:rPr sz="1800" b="0">
-                <a:solidFill>
-                  <a:srgbClr val="3D3D3D"/>
-                </a:solidFill>
-                <a:latin typeface="Pretendard"/>
-                <a:ea typeface="Pretendard"/>
-                <a:cs typeface="Pretendard"/>
-              </a:rPr>
-              <a:t>mkdir -p ~/lakehouse/data &amp;&amp; cd ~/lakehouse</a:t>
-            </a:r>
-          </a:p>
-        </p:txBody>
-      </p:sp>
-      <p:sp>
-        <p:nvSpPr>
-          <p:cNvPr id="12" name="Rectangle 11"/>
-          <p:cNvSpPr/>
-          <p:nvPr/>
-        </p:nvSpPr>
-        <p:spPr>
-          <a:xfrm>
-            <a:off x="1143000" y="3429000"/>
-            <a:ext cx="738021" cy="571500"/>
-          </a:xfrm>
-          <a:prstGeom prst="rect">
-            <a:avLst/>
-          </a:prstGeom>
-          <a:solidFill>
-            <a:srgbClr val="0D2B5E"/>
-          </a:solidFill>
-          <a:ln>
-            <a:noFill/>
-          </a:ln>
-          <a:effectLst/>
-        </p:spPr>
-        <p:txBody>
-          <a:bodyPr rtlCol="0" anchor="ctr" wrap="square"/>
-          <a:lstStyle/>
-          <a:p>
-            <a:pPr algn="ctr"/>
-          </a:p>
-        </p:txBody>
-      </p:sp>
-      <p:sp>
-        <p:nvSpPr>
-          <p:cNvPr id="13" name="TextBox 12"/>
-          <p:cNvSpPr txBox="1"/>
-          <p:nvPr/>
-        </p:nvSpPr>
-        <p:spPr>
-          <a:xfrm>
-            <a:off x="1143000" y="3429000"/>
-            <a:ext cx="738021" cy="571500"/>
-          </a:xfrm>
-          <a:prstGeom prst="rect">
-            <a:avLst/>
-          </a:prstGeom>
-          <a:noFill/>
-        </p:spPr>
-        <p:txBody>
-          <a:bodyPr wrap="square" lIns="0" rIns="0" tIns="0" bIns="0" anchor="ctr">
-            <a:spAutoFit/>
-          </a:bodyPr>
-          <a:lstStyle/>
-          <a:p>
-            <a:pPr algn="ctr">
-              <a:lnSpc>
-                <a:spcPct val="100000"/>
-              </a:lnSpc>
-            </a:pPr>
-            <a:r>
-              <a:rPr sz="1800" b="1">
-                <a:solidFill>
-                  <a:srgbClr val="FFFFFF"/>
-                </a:solidFill>
-                <a:latin typeface="Pretendard"/>
-                <a:ea typeface="Pretendard"/>
-                <a:cs typeface="Pretendard"/>
-              </a:rPr>
-              <a:t>검증</a:t>
-            </a:r>
-          </a:p>
-        </p:txBody>
-      </p:sp>
-      <p:sp>
-        <p:nvSpPr>
-          <p:cNvPr id="14" name="Rectangle 13"/>
-          <p:cNvSpPr/>
-          <p:nvPr/>
-        </p:nvSpPr>
-        <p:spPr>
-          <a:xfrm>
-            <a:off x="1881021" y="3429000"/>
-            <a:ext cx="15263979" cy="571500"/>
-          </a:xfrm>
-          <a:prstGeom prst="rect">
-            <a:avLst/>
+              <a:rPr sz="1875" b="1">
+                <a:solidFill>
+                  <a:srgbClr val="0D2B5E"/>
+                </a:solidFill>
+                <a:latin typeface="Pretendard"/>
+                <a:ea typeface="Pretendard"/>
+                <a:cs typeface="Pretendard"/>
+              </a:rPr>
+              <a:t>ports</a:t>
+            </a:r>
+          </a:p>
+        </p:txBody>
+      </p:sp>
+      <p:sp>
+        <p:nvSpPr>
+          <p:cNvPr id="18" name="Rounded Rectangle 17"/>
+          <p:cNvSpPr/>
+          <p:nvPr/>
+        </p:nvSpPr>
+        <p:spPr>
+          <a:xfrm>
+            <a:off x="6903720" y="3969544"/>
+            <a:ext cx="10241280" cy="445294"/>
+          </a:xfrm>
+          <a:prstGeom prst="roundRect">
+            <a:avLst>
+              <a:gd name="adj" fmla="val 8556"/>
+            </a:avLst>
           </a:prstGeom>
           <a:solidFill>
             <a:srgbClr val="FAFBFD"/>
@@ -9892,14 +9545,14 @@
       </p:sp>
       <p:sp>
         <p:nvSpPr>
-          <p:cNvPr id="15" name="TextBox 14"/>
-          <p:cNvSpPr txBox="1"/>
-          <p:nvPr/>
-        </p:nvSpPr>
-        <p:spPr>
-          <a:xfrm>
-            <a:off x="2033421" y="3429000"/>
-            <a:ext cx="14959179" cy="571500"/>
+          <p:cNvPr id="19" name="TextBox 18"/>
+          <p:cNvSpPr txBox="1"/>
+          <p:nvPr/>
+        </p:nvSpPr>
+        <p:spPr>
+          <a:xfrm>
+            <a:off x="6998970" y="3969544"/>
+            <a:ext cx="10050780" cy="445294"/>
           </a:xfrm>
           <a:prstGeom prst="rect">
             <a:avLst/>
@@ -9912,109 +9565,115 @@
           </a:bodyPr>
           <a:lstStyle/>
           <a:p>
+            <a:pPr algn="ctr">
+              <a:lnSpc>
+                <a:spcPct val="115000"/>
+              </a:lnSpc>
+            </a:pPr>
+            <a:r>
+              <a:rPr sz="1875" b="0">
+                <a:solidFill>
+                  <a:srgbClr val="3D3D3D"/>
+                </a:solidFill>
+                <a:latin typeface="Pretendard"/>
+                <a:ea typeface="Pretendard"/>
+                <a:cs typeface="Pretendard"/>
+              </a:rPr>
+              <a:t>9000 S3 API · 9001 웹 콘솔</a:t>
+            </a:r>
+          </a:p>
+        </p:txBody>
+      </p:sp>
+      <p:sp>
+        <p:nvSpPr>
+          <p:cNvPr id="20" name="Rounded Rectangle 19"/>
+          <p:cNvSpPr/>
+          <p:nvPr/>
+        </p:nvSpPr>
+        <p:spPr>
+          <a:xfrm>
+            <a:off x="1143000" y="4491038"/>
+            <a:ext cx="5722620" cy="445294"/>
+          </a:xfrm>
+          <a:prstGeom prst="roundRect">
+            <a:avLst>
+              <a:gd name="adj" fmla="val 8556"/>
+            </a:avLst>
+          </a:prstGeom>
+          <a:solidFill>
+            <a:srgbClr val="EDF3FD"/>
+          </a:solidFill>
+          <a:ln w="9525">
+            <a:solidFill>
+              <a:srgbClr val="BFD3F5"/>
+            </a:solidFill>
+          </a:ln>
+          <a:effectLst/>
+        </p:spPr>
+        <p:txBody>
+          <a:bodyPr rtlCol="0" anchor="ctr" wrap="square"/>
+          <a:lstStyle/>
+          <a:p>
+            <a:pPr algn="ctr"/>
+          </a:p>
+        </p:txBody>
+      </p:sp>
+      <p:sp>
+        <p:nvSpPr>
+          <p:cNvPr id="21" name="TextBox 20"/>
+          <p:cNvSpPr txBox="1"/>
+          <p:nvPr/>
+        </p:nvSpPr>
+        <p:spPr>
+          <a:xfrm>
+            <a:off x="1238250" y="4491038"/>
+            <a:ext cx="5532120" cy="445294"/>
+          </a:xfrm>
+          <a:prstGeom prst="rect">
+            <a:avLst/>
+          </a:prstGeom>
+          <a:noFill/>
+        </p:spPr>
+        <p:txBody>
+          <a:bodyPr wrap="square" lIns="0" rIns="0" tIns="0" bIns="0" anchor="ctr">
+            <a:spAutoFit/>
+          </a:bodyPr>
+          <a:lstStyle/>
+          <a:p>
             <a:pPr algn="l">
               <a:lnSpc>
                 <a:spcPct val="115000"/>
               </a:lnSpc>
             </a:pPr>
             <a:r>
-              <a:rPr sz="1800" b="0">
-                <a:solidFill>
-                  <a:srgbClr val="3D3D3D"/>
-                </a:solidFill>
-                <a:latin typeface="Pretendard"/>
-                <a:ea typeface="Pretendard"/>
-                <a:cs typeface="Pretendard"/>
-              </a:rPr>
-              <a:t>docker compose config</a:t>
-            </a:r>
-          </a:p>
-        </p:txBody>
-      </p:sp>
-      <p:sp>
-        <p:nvSpPr>
-          <p:cNvPr id="16" name="Rectangle 15"/>
-          <p:cNvSpPr/>
-          <p:nvPr/>
-        </p:nvSpPr>
-        <p:spPr>
-          <a:xfrm>
-            <a:off x="1143000" y="4076700"/>
-            <a:ext cx="738021" cy="571500"/>
-          </a:xfrm>
-          <a:prstGeom prst="rect">
-            <a:avLst/>
-          </a:prstGeom>
-          <a:solidFill>
-            <a:srgbClr val="0D2B5E"/>
-          </a:solidFill>
-          <a:ln>
-            <a:noFill/>
-          </a:ln>
-          <a:effectLst/>
-        </p:spPr>
-        <p:txBody>
-          <a:bodyPr rtlCol="0" anchor="ctr" wrap="square"/>
-          <a:lstStyle/>
-          <a:p>
-            <a:pPr algn="ctr"/>
-          </a:p>
-        </p:txBody>
-      </p:sp>
-      <p:sp>
-        <p:nvSpPr>
-          <p:cNvPr id="17" name="TextBox 16"/>
-          <p:cNvSpPr txBox="1"/>
-          <p:nvPr/>
-        </p:nvSpPr>
-        <p:spPr>
-          <a:xfrm>
-            <a:off x="1143000" y="4076700"/>
-            <a:ext cx="738021" cy="571500"/>
-          </a:xfrm>
-          <a:prstGeom prst="rect">
-            <a:avLst/>
-          </a:prstGeom>
-          <a:noFill/>
-        </p:spPr>
-        <p:txBody>
-          <a:bodyPr wrap="square" lIns="0" rIns="0" tIns="0" bIns="0" anchor="ctr">
-            <a:spAutoFit/>
-          </a:bodyPr>
-          <a:lstStyle/>
-          <a:p>
-            <a:pPr algn="ctr">
-              <a:lnSpc>
-                <a:spcPct val="100000"/>
-              </a:lnSpc>
-            </a:pPr>
-            <a:r>
-              <a:rPr sz="1800" b="1">
-                <a:solidFill>
-                  <a:srgbClr val="FFFFFF"/>
-                </a:solidFill>
-                <a:latin typeface="Pretendard"/>
-                <a:ea typeface="Pretendard"/>
-                <a:cs typeface="Pretendard"/>
-              </a:rPr>
-              <a:t>기동</a:t>
-            </a:r>
-          </a:p>
-        </p:txBody>
-      </p:sp>
-      <p:sp>
-        <p:nvSpPr>
-          <p:cNvPr id="18" name="Rectangle 17"/>
-          <p:cNvSpPr/>
-          <p:nvPr/>
-        </p:nvSpPr>
-        <p:spPr>
-          <a:xfrm>
-            <a:off x="1881021" y="4076700"/>
-            <a:ext cx="15263979" cy="571500"/>
-          </a:xfrm>
-          <a:prstGeom prst="rect">
-            <a:avLst/>
+              <a:rPr sz="1875" b="1">
+                <a:solidFill>
+                  <a:srgbClr val="0D2B5E"/>
+                </a:solidFill>
+                <a:latin typeface="Pretendard"/>
+                <a:ea typeface="Pretendard"/>
+                <a:cs typeface="Pretendard"/>
+              </a:rPr>
+              <a:t>environment</a:t>
+            </a:r>
+          </a:p>
+        </p:txBody>
+      </p:sp>
+      <p:sp>
+        <p:nvSpPr>
+          <p:cNvPr id="22" name="Rounded Rectangle 21"/>
+          <p:cNvSpPr/>
+          <p:nvPr/>
+        </p:nvSpPr>
+        <p:spPr>
+          <a:xfrm>
+            <a:off x="6903720" y="4491038"/>
+            <a:ext cx="10241280" cy="445294"/>
+          </a:xfrm>
+          <a:prstGeom prst="roundRect">
+            <a:avLst>
+              <a:gd name="adj" fmla="val 8556"/>
+            </a:avLst>
           </a:prstGeom>
           <a:solidFill>
             <a:srgbClr val="FAFBFD"/>
@@ -10036,14 +9695,14 @@
       </p:sp>
       <p:sp>
         <p:nvSpPr>
-          <p:cNvPr id="19" name="TextBox 18"/>
-          <p:cNvSpPr txBox="1"/>
-          <p:nvPr/>
-        </p:nvSpPr>
-        <p:spPr>
-          <a:xfrm>
-            <a:off x="2033421" y="4076700"/>
-            <a:ext cx="14959179" cy="571500"/>
+          <p:cNvPr id="23" name="TextBox 22"/>
+          <p:cNvSpPr txBox="1"/>
+          <p:nvPr/>
+        </p:nvSpPr>
+        <p:spPr>
+          <a:xfrm>
+            <a:off x="6998970" y="4491038"/>
+            <a:ext cx="10050780" cy="445294"/>
           </a:xfrm>
           <a:prstGeom prst="rect">
             <a:avLst/>
@@ -10056,109 +9715,115 @@
           </a:bodyPr>
           <a:lstStyle/>
           <a:p>
+            <a:pPr algn="ctr">
+              <a:lnSpc>
+                <a:spcPct val="115000"/>
+              </a:lnSpc>
+            </a:pPr>
+            <a:r>
+              <a:rPr sz="1875" b="0">
+                <a:solidFill>
+                  <a:srgbClr val="3D3D3D"/>
+                </a:solidFill>
+                <a:latin typeface="Pretendard"/>
+                <a:ea typeface="Pretendard"/>
+                <a:cs typeface="Pretendard"/>
+              </a:rPr>
+              <a:t>루트 계정 minioadmin (실습 전용)</a:t>
+            </a:r>
+          </a:p>
+        </p:txBody>
+      </p:sp>
+      <p:sp>
+        <p:nvSpPr>
+          <p:cNvPr id="24" name="Rounded Rectangle 23"/>
+          <p:cNvSpPr/>
+          <p:nvPr/>
+        </p:nvSpPr>
+        <p:spPr>
+          <a:xfrm>
+            <a:off x="1143000" y="5012531"/>
+            <a:ext cx="5722620" cy="445294"/>
+          </a:xfrm>
+          <a:prstGeom prst="roundRect">
+            <a:avLst>
+              <a:gd name="adj" fmla="val 8556"/>
+            </a:avLst>
+          </a:prstGeom>
+          <a:solidFill>
+            <a:srgbClr val="EDF3FD"/>
+          </a:solidFill>
+          <a:ln w="9525">
+            <a:solidFill>
+              <a:srgbClr val="BFD3F5"/>
+            </a:solidFill>
+          </a:ln>
+          <a:effectLst/>
+        </p:spPr>
+        <p:txBody>
+          <a:bodyPr rtlCol="0" anchor="ctr" wrap="square"/>
+          <a:lstStyle/>
+          <a:p>
+            <a:pPr algn="ctr"/>
+          </a:p>
+        </p:txBody>
+      </p:sp>
+      <p:sp>
+        <p:nvSpPr>
+          <p:cNvPr id="25" name="TextBox 24"/>
+          <p:cNvSpPr txBox="1"/>
+          <p:nvPr/>
+        </p:nvSpPr>
+        <p:spPr>
+          <a:xfrm>
+            <a:off x="1238250" y="5012531"/>
+            <a:ext cx="5532120" cy="445294"/>
+          </a:xfrm>
+          <a:prstGeom prst="rect">
+            <a:avLst/>
+          </a:prstGeom>
+          <a:noFill/>
+        </p:spPr>
+        <p:txBody>
+          <a:bodyPr wrap="square" lIns="0" rIns="0" tIns="0" bIns="0" anchor="ctr">
+            <a:spAutoFit/>
+          </a:bodyPr>
+          <a:lstStyle/>
+          <a:p>
             <a:pPr algn="l">
               <a:lnSpc>
                 <a:spcPct val="115000"/>
               </a:lnSpc>
             </a:pPr>
             <a:r>
-              <a:rPr sz="1800" b="0">
-                <a:solidFill>
-                  <a:srgbClr val="3D3D3D"/>
-                </a:solidFill>
-                <a:latin typeface="Pretendard"/>
-                <a:ea typeface="Pretendard"/>
-                <a:cs typeface="Pretendard"/>
-              </a:rPr>
-              <a:t>docker compose up -d</a:t>
-            </a:r>
-          </a:p>
-        </p:txBody>
-      </p:sp>
-      <p:sp>
-        <p:nvSpPr>
-          <p:cNvPr id="20" name="Rectangle 19"/>
-          <p:cNvSpPr/>
-          <p:nvPr/>
-        </p:nvSpPr>
-        <p:spPr>
-          <a:xfrm>
-            <a:off x="1143000" y="4724400"/>
-            <a:ext cx="738021" cy="571500"/>
-          </a:xfrm>
-          <a:prstGeom prst="rect">
-            <a:avLst/>
-          </a:prstGeom>
-          <a:solidFill>
-            <a:srgbClr val="0D2B5E"/>
-          </a:solidFill>
-          <a:ln>
-            <a:noFill/>
-          </a:ln>
-          <a:effectLst/>
-        </p:spPr>
-        <p:txBody>
-          <a:bodyPr rtlCol="0" anchor="ctr" wrap="square"/>
-          <a:lstStyle/>
-          <a:p>
-            <a:pPr algn="ctr"/>
-          </a:p>
-        </p:txBody>
-      </p:sp>
-      <p:sp>
-        <p:nvSpPr>
-          <p:cNvPr id="21" name="TextBox 20"/>
-          <p:cNvSpPr txBox="1"/>
-          <p:nvPr/>
-        </p:nvSpPr>
-        <p:spPr>
-          <a:xfrm>
-            <a:off x="1143000" y="4724400"/>
-            <a:ext cx="738021" cy="571500"/>
-          </a:xfrm>
-          <a:prstGeom prst="rect">
-            <a:avLst/>
-          </a:prstGeom>
-          <a:noFill/>
-        </p:spPr>
-        <p:txBody>
-          <a:bodyPr wrap="square" lIns="0" rIns="0" tIns="0" bIns="0" anchor="ctr">
-            <a:spAutoFit/>
-          </a:bodyPr>
-          <a:lstStyle/>
-          <a:p>
-            <a:pPr algn="ctr">
-              <a:lnSpc>
-                <a:spcPct val="100000"/>
-              </a:lnSpc>
-            </a:pPr>
-            <a:r>
-              <a:rPr sz="1800" b="1">
-                <a:solidFill>
-                  <a:srgbClr val="FFFFFF"/>
-                </a:solidFill>
-                <a:latin typeface="Pretendard"/>
-                <a:ea typeface="Pretendard"/>
-                <a:cs typeface="Pretendard"/>
-              </a:rPr>
-              <a:t>상태</a:t>
-            </a:r>
-          </a:p>
-        </p:txBody>
-      </p:sp>
-      <p:sp>
-        <p:nvSpPr>
-          <p:cNvPr id="22" name="Rectangle 21"/>
-          <p:cNvSpPr/>
-          <p:nvPr/>
-        </p:nvSpPr>
-        <p:spPr>
-          <a:xfrm>
-            <a:off x="1881021" y="4724400"/>
-            <a:ext cx="15263979" cy="571500"/>
-          </a:xfrm>
-          <a:prstGeom prst="rect">
-            <a:avLst/>
+              <a:rPr sz="1875" b="1">
+                <a:solidFill>
+                  <a:srgbClr val="0D2B5E"/>
+                </a:solidFill>
+                <a:latin typeface="Pretendard"/>
+                <a:ea typeface="Pretendard"/>
+                <a:cs typeface="Pretendard"/>
+              </a:rPr>
+              <a:t>volumes minio-data</a:t>
+            </a:r>
+          </a:p>
+        </p:txBody>
+      </p:sp>
+      <p:sp>
+        <p:nvSpPr>
+          <p:cNvPr id="26" name="Rounded Rectangle 25"/>
+          <p:cNvSpPr/>
+          <p:nvPr/>
+        </p:nvSpPr>
+        <p:spPr>
+          <a:xfrm>
+            <a:off x="6903720" y="5012531"/>
+            <a:ext cx="10241280" cy="445294"/>
+          </a:xfrm>
+          <a:prstGeom prst="roundRect">
+            <a:avLst>
+              <a:gd name="adj" fmla="val 8556"/>
+            </a:avLst>
           </a:prstGeom>
           <a:solidFill>
             <a:srgbClr val="FAFBFD"/>
@@ -10180,14 +9845,14 @@
       </p:sp>
       <p:sp>
         <p:nvSpPr>
-          <p:cNvPr id="23" name="TextBox 22"/>
-          <p:cNvSpPr txBox="1"/>
-          <p:nvPr/>
-        </p:nvSpPr>
-        <p:spPr>
-          <a:xfrm>
-            <a:off x="2033421" y="4724400"/>
-            <a:ext cx="14959179" cy="571500"/>
+          <p:cNvPr id="27" name="TextBox 26"/>
+          <p:cNvSpPr txBox="1"/>
+          <p:nvPr/>
+        </p:nvSpPr>
+        <p:spPr>
+          <a:xfrm>
+            <a:off x="6998970" y="5012531"/>
+            <a:ext cx="10050780" cy="445294"/>
           </a:xfrm>
           <a:prstGeom prst="rect">
             <a:avLst/>
@@ -10200,109 +9865,115 @@
           </a:bodyPr>
           <a:lstStyle/>
           <a:p>
+            <a:pPr algn="ctr">
+              <a:lnSpc>
+                <a:spcPct val="115000"/>
+              </a:lnSpc>
+            </a:pPr>
+            <a:r>
+              <a:rPr sz="1875" b="0">
+                <a:solidFill>
+                  <a:srgbClr val="3D3D3D"/>
+                </a:solidFill>
+                <a:latin typeface="Pretendard"/>
+                <a:ea typeface="Pretendard"/>
+                <a:cs typeface="Pretendard"/>
+              </a:rPr>
+              <a:t>이름 볼륨 lakehouse_minio-data</a:t>
+            </a:r>
+          </a:p>
+        </p:txBody>
+      </p:sp>
+      <p:sp>
+        <p:nvSpPr>
+          <p:cNvPr id="28" name="Rounded Rectangle 27"/>
+          <p:cNvSpPr/>
+          <p:nvPr/>
+        </p:nvSpPr>
+        <p:spPr>
+          <a:xfrm>
+            <a:off x="1143000" y="5534025"/>
+            <a:ext cx="5722620" cy="445294"/>
+          </a:xfrm>
+          <a:prstGeom prst="roundRect">
+            <a:avLst>
+              <a:gd name="adj" fmla="val 8556"/>
+            </a:avLst>
+          </a:prstGeom>
+          <a:solidFill>
+            <a:srgbClr val="EDF3FD"/>
+          </a:solidFill>
+          <a:ln w="9525">
+            <a:solidFill>
+              <a:srgbClr val="BFD3F5"/>
+            </a:solidFill>
+          </a:ln>
+          <a:effectLst/>
+        </p:spPr>
+        <p:txBody>
+          <a:bodyPr rtlCol="0" anchor="ctr" wrap="square"/>
+          <a:lstStyle/>
+          <a:p>
+            <a:pPr algn="ctr"/>
+          </a:p>
+        </p:txBody>
+      </p:sp>
+      <p:sp>
+        <p:nvSpPr>
+          <p:cNvPr id="29" name="TextBox 28"/>
+          <p:cNvSpPr txBox="1"/>
+          <p:nvPr/>
+        </p:nvSpPr>
+        <p:spPr>
+          <a:xfrm>
+            <a:off x="1238250" y="5534025"/>
+            <a:ext cx="5532120" cy="445294"/>
+          </a:xfrm>
+          <a:prstGeom prst="rect">
+            <a:avLst/>
+          </a:prstGeom>
+          <a:noFill/>
+        </p:spPr>
+        <p:txBody>
+          <a:bodyPr wrap="square" lIns="0" rIns="0" tIns="0" bIns="0" anchor="ctr">
+            <a:spAutoFit/>
+          </a:bodyPr>
+          <a:lstStyle/>
+          <a:p>
             <a:pPr algn="l">
               <a:lnSpc>
                 <a:spcPct val="115000"/>
               </a:lnSpc>
             </a:pPr>
             <a:r>
-              <a:rPr sz="1800" b="0">
-                <a:solidFill>
-                  <a:srgbClr val="3D3D3D"/>
-                </a:solidFill>
-                <a:latin typeface="Pretendard"/>
-                <a:ea typeface="Pretendard"/>
-                <a:cs typeface="Pretendard"/>
-              </a:rPr>
-              <a:t>docker compose ps</a:t>
-            </a:r>
-          </a:p>
-        </p:txBody>
-      </p:sp>
-      <p:sp>
-        <p:nvSpPr>
-          <p:cNvPr id="24" name="Rectangle 23"/>
-          <p:cNvSpPr/>
-          <p:nvPr/>
-        </p:nvSpPr>
-        <p:spPr>
-          <a:xfrm>
-            <a:off x="1143000" y="5372100"/>
-            <a:ext cx="738021" cy="571500"/>
-          </a:xfrm>
-          <a:prstGeom prst="rect">
-            <a:avLst/>
-          </a:prstGeom>
-          <a:solidFill>
-            <a:srgbClr val="0D2B5E"/>
-          </a:solidFill>
-          <a:ln>
-            <a:noFill/>
-          </a:ln>
-          <a:effectLst/>
-        </p:spPr>
-        <p:txBody>
-          <a:bodyPr rtlCol="0" anchor="ctr" wrap="square"/>
-          <a:lstStyle/>
-          <a:p>
-            <a:pPr algn="ctr"/>
-          </a:p>
-        </p:txBody>
-      </p:sp>
-      <p:sp>
-        <p:nvSpPr>
-          <p:cNvPr id="25" name="TextBox 24"/>
-          <p:cNvSpPr txBox="1"/>
-          <p:nvPr/>
-        </p:nvSpPr>
-        <p:spPr>
-          <a:xfrm>
-            <a:off x="1143000" y="5372100"/>
-            <a:ext cx="738021" cy="571500"/>
-          </a:xfrm>
-          <a:prstGeom prst="rect">
-            <a:avLst/>
-          </a:prstGeom>
-          <a:noFill/>
-        </p:spPr>
-        <p:txBody>
-          <a:bodyPr wrap="square" lIns="0" rIns="0" tIns="0" bIns="0" anchor="ctr">
-            <a:spAutoFit/>
-          </a:bodyPr>
-          <a:lstStyle/>
-          <a:p>
-            <a:pPr algn="ctr">
-              <a:lnSpc>
-                <a:spcPct val="100000"/>
-              </a:lnSpc>
-            </a:pPr>
-            <a:r>
-              <a:rPr sz="1800" b="1">
-                <a:solidFill>
-                  <a:srgbClr val="FFFFFF"/>
-                </a:solidFill>
-                <a:latin typeface="Pretendard"/>
-                <a:ea typeface="Pretendard"/>
-                <a:cs typeface="Pretendard"/>
-              </a:rPr>
-              <a:t>콘솔</a:t>
-            </a:r>
-          </a:p>
-        </p:txBody>
-      </p:sp>
-      <p:sp>
-        <p:nvSpPr>
-          <p:cNvPr id="26" name="Rectangle 25"/>
-          <p:cNvSpPr/>
-          <p:nvPr/>
-        </p:nvSpPr>
-        <p:spPr>
-          <a:xfrm>
-            <a:off x="1881021" y="5372100"/>
-            <a:ext cx="15263979" cy="571500"/>
-          </a:xfrm>
-          <a:prstGeom prst="rect">
-            <a:avLst/>
+              <a:rPr sz="1875" b="1">
+                <a:solidFill>
+                  <a:srgbClr val="0D2B5E"/>
+                </a:solidFill>
+                <a:latin typeface="Pretendard"/>
+                <a:ea typeface="Pretendard"/>
+                <a:cs typeface="Pretendard"/>
+              </a:rPr>
+              <a:t>mc: image</a:t>
+            </a:r>
+          </a:p>
+        </p:txBody>
+      </p:sp>
+      <p:sp>
+        <p:nvSpPr>
+          <p:cNvPr id="30" name="Rounded Rectangle 29"/>
+          <p:cNvSpPr/>
+          <p:nvPr/>
+        </p:nvSpPr>
+        <p:spPr>
+          <a:xfrm>
+            <a:off x="6903720" y="5534025"/>
+            <a:ext cx="10241280" cy="445294"/>
+          </a:xfrm>
+          <a:prstGeom prst="roundRect">
+            <a:avLst>
+              <a:gd name="adj" fmla="val 8556"/>
+            </a:avLst>
           </a:prstGeom>
           <a:solidFill>
             <a:srgbClr val="FAFBFD"/>
@@ -10324,14 +9995,14 @@
       </p:sp>
       <p:sp>
         <p:nvSpPr>
-          <p:cNvPr id="27" name="TextBox 26"/>
-          <p:cNvSpPr txBox="1"/>
-          <p:nvPr/>
-        </p:nvSpPr>
-        <p:spPr>
-          <a:xfrm>
-            <a:off x="2033421" y="5372100"/>
-            <a:ext cx="14959179" cy="571500"/>
+          <p:cNvPr id="31" name="TextBox 30"/>
+          <p:cNvSpPr txBox="1"/>
+          <p:nvPr/>
+        </p:nvSpPr>
+        <p:spPr>
+          <a:xfrm>
+            <a:off x="6998970" y="5534025"/>
+            <a:ext cx="10050780" cy="445294"/>
           </a:xfrm>
           <a:prstGeom prst="rect">
             <a:avLst/>
@@ -10344,13 +10015,163 @@
           </a:bodyPr>
           <a:lstStyle/>
           <a:p>
+            <a:pPr algn="ctr">
+              <a:lnSpc>
+                <a:spcPct val="115000"/>
+              </a:lnSpc>
+            </a:pPr>
+            <a:r>
+              <a:rPr sz="1875" b="0">
+                <a:solidFill>
+                  <a:srgbClr val="3D3D3D"/>
+                </a:solidFill>
+                <a:latin typeface="Pretendard"/>
+                <a:ea typeface="Pretendard"/>
+                <a:cs typeface="Pretendard"/>
+              </a:rPr>
+              <a:t>pgsty/mc — 클라이언트</a:t>
+            </a:r>
+          </a:p>
+        </p:txBody>
+      </p:sp>
+      <p:sp>
+        <p:nvSpPr>
+          <p:cNvPr id="32" name="Rounded Rectangle 31"/>
+          <p:cNvSpPr/>
+          <p:nvPr/>
+        </p:nvSpPr>
+        <p:spPr>
+          <a:xfrm>
+            <a:off x="1143000" y="6055519"/>
+            <a:ext cx="5722620" cy="445294"/>
+          </a:xfrm>
+          <a:prstGeom prst="roundRect">
+            <a:avLst>
+              <a:gd name="adj" fmla="val 8556"/>
+            </a:avLst>
+          </a:prstGeom>
+          <a:solidFill>
+            <a:srgbClr val="EDF3FD"/>
+          </a:solidFill>
+          <a:ln w="9525">
+            <a:solidFill>
+              <a:srgbClr val="BFD3F5"/>
+            </a:solidFill>
+          </a:ln>
+          <a:effectLst/>
+        </p:spPr>
+        <p:txBody>
+          <a:bodyPr rtlCol="0" anchor="ctr" wrap="square"/>
+          <a:lstStyle/>
+          <a:p>
+            <a:pPr algn="ctr"/>
+          </a:p>
+        </p:txBody>
+      </p:sp>
+      <p:sp>
+        <p:nvSpPr>
+          <p:cNvPr id="33" name="TextBox 32"/>
+          <p:cNvSpPr txBox="1"/>
+          <p:nvPr/>
+        </p:nvSpPr>
+        <p:spPr>
+          <a:xfrm>
+            <a:off x="1238250" y="6055519"/>
+            <a:ext cx="5532120" cy="445294"/>
+          </a:xfrm>
+          <a:prstGeom prst="rect">
+            <a:avLst/>
+          </a:prstGeom>
+          <a:noFill/>
+        </p:spPr>
+        <p:txBody>
+          <a:bodyPr wrap="square" lIns="0" rIns="0" tIns="0" bIns="0" anchor="ctr">
+            <a:spAutoFit/>
+          </a:bodyPr>
+          <a:lstStyle/>
+          <a:p>
             <a:pPr algn="l">
               <a:lnSpc>
                 <a:spcPct val="115000"/>
               </a:lnSpc>
             </a:pPr>
             <a:r>
-              <a:rPr sz="1800" b="0">
+              <a:rPr sz="1875" b="1">
+                <a:solidFill>
+                  <a:srgbClr val="0D2B5E"/>
+                </a:solidFill>
+                <a:latin typeface="Pretendard"/>
+                <a:ea typeface="Pretendard"/>
+                <a:cs typeface="Pretendard"/>
+              </a:rPr>
+              <a:t>mc: MC_HOST_local</a:t>
+            </a:r>
+          </a:p>
+        </p:txBody>
+      </p:sp>
+      <p:sp>
+        <p:nvSpPr>
+          <p:cNvPr id="34" name="Rounded Rectangle 33"/>
+          <p:cNvSpPr/>
+          <p:nvPr/>
+        </p:nvSpPr>
+        <p:spPr>
+          <a:xfrm>
+            <a:off x="6903720" y="6055519"/>
+            <a:ext cx="10241280" cy="445294"/>
+          </a:xfrm>
+          <a:prstGeom prst="roundRect">
+            <a:avLst>
+              <a:gd name="adj" fmla="val 8556"/>
+            </a:avLst>
+          </a:prstGeom>
+          <a:solidFill>
+            <a:srgbClr val="FAFBFD"/>
+          </a:solidFill>
+          <a:ln w="9525">
+            <a:solidFill>
+              <a:srgbClr val="DCE1E8"/>
+            </a:solidFill>
+          </a:ln>
+          <a:effectLst/>
+        </p:spPr>
+        <p:txBody>
+          <a:bodyPr rtlCol="0" anchor="ctr" wrap="square"/>
+          <a:lstStyle/>
+          <a:p>
+            <a:pPr algn="ctr"/>
+          </a:p>
+        </p:txBody>
+      </p:sp>
+      <p:sp>
+        <p:nvSpPr>
+          <p:cNvPr id="35" name="TextBox 34"/>
+          <p:cNvSpPr txBox="1"/>
+          <p:nvPr/>
+        </p:nvSpPr>
+        <p:spPr>
+          <a:xfrm>
+            <a:off x="6998970" y="6055519"/>
+            <a:ext cx="10050780" cy="445294"/>
+          </a:xfrm>
+          <a:prstGeom prst="rect">
+            <a:avLst/>
+          </a:prstGeom>
+          <a:noFill/>
+        </p:spPr>
+        <p:txBody>
+          <a:bodyPr wrap="square" lIns="0" rIns="0" tIns="0" bIns="0" anchor="ctr">
+            <a:spAutoFit/>
+          </a:bodyPr>
+          <a:lstStyle/>
+          <a:p>
+            <a:pPr algn="ctr">
+              <a:lnSpc>
+                <a:spcPct val="115000"/>
+              </a:lnSpc>
+            </a:pPr>
+            <a:r>
+              <a:rPr sz="1875" b="0">
                 <a:solidFill>
                   <a:srgbClr val="3D3D3D"/>
                 </a:solidFill>
@@ -10358,14 +10179,314 @@
                 <a:ea typeface="Pretendard"/>
                 <a:cs typeface="Pretendard"/>
               </a:rPr>
-              <a:t>http://localhost:9001 → minioadmin / minioadmin</a:t>
-            </a:r>
-          </a:p>
-        </p:txBody>
-      </p:sp>
-      <p:sp>
-        <p:nvSpPr>
-          <p:cNvPr id="28" name="TextBox 27"/>
+              <a:t>별칭 local → minio:9000</a:t>
+            </a:r>
+          </a:p>
+        </p:txBody>
+      </p:sp>
+      <p:sp>
+        <p:nvSpPr>
+          <p:cNvPr id="36" name="Rounded Rectangle 35"/>
+          <p:cNvSpPr/>
+          <p:nvPr/>
+        </p:nvSpPr>
+        <p:spPr>
+          <a:xfrm>
+            <a:off x="1143000" y="6577012"/>
+            <a:ext cx="5722620" cy="445294"/>
+          </a:xfrm>
+          <a:prstGeom prst="roundRect">
+            <a:avLst>
+              <a:gd name="adj" fmla="val 8556"/>
+            </a:avLst>
+          </a:prstGeom>
+          <a:solidFill>
+            <a:srgbClr val="EDF3FD"/>
+          </a:solidFill>
+          <a:ln w="9525">
+            <a:solidFill>
+              <a:srgbClr val="BFD3F5"/>
+            </a:solidFill>
+          </a:ln>
+          <a:effectLst/>
+        </p:spPr>
+        <p:txBody>
+          <a:bodyPr rtlCol="0" anchor="ctr" wrap="square"/>
+          <a:lstStyle/>
+          <a:p>
+            <a:pPr algn="ctr"/>
+          </a:p>
+        </p:txBody>
+      </p:sp>
+      <p:sp>
+        <p:nvSpPr>
+          <p:cNvPr id="37" name="TextBox 36"/>
+          <p:cNvSpPr txBox="1"/>
+          <p:nvPr/>
+        </p:nvSpPr>
+        <p:spPr>
+          <a:xfrm>
+            <a:off x="1238250" y="6577012"/>
+            <a:ext cx="5532120" cy="445294"/>
+          </a:xfrm>
+          <a:prstGeom prst="rect">
+            <a:avLst/>
+          </a:prstGeom>
+          <a:noFill/>
+        </p:spPr>
+        <p:txBody>
+          <a:bodyPr wrap="square" lIns="0" rIns="0" tIns="0" bIns="0" anchor="ctr">
+            <a:spAutoFit/>
+          </a:bodyPr>
+          <a:lstStyle/>
+          <a:p>
+            <a:pPr algn="l">
+              <a:lnSpc>
+                <a:spcPct val="115000"/>
+              </a:lnSpc>
+            </a:pPr>
+            <a:r>
+              <a:rPr sz="1875" b="1">
+                <a:solidFill>
+                  <a:srgbClr val="0D2B5E"/>
+                </a:solidFill>
+                <a:latin typeface="Pretendard"/>
+                <a:ea typeface="Pretendard"/>
+                <a:cs typeface="Pretendard"/>
+              </a:rPr>
+              <a:t>mc: entrypoint</a:t>
+            </a:r>
+          </a:p>
+        </p:txBody>
+      </p:sp>
+      <p:sp>
+        <p:nvSpPr>
+          <p:cNvPr id="38" name="Rounded Rectangle 37"/>
+          <p:cNvSpPr/>
+          <p:nvPr/>
+        </p:nvSpPr>
+        <p:spPr>
+          <a:xfrm>
+            <a:off x="6903720" y="6577012"/>
+            <a:ext cx="10241280" cy="445294"/>
+          </a:xfrm>
+          <a:prstGeom prst="roundRect">
+            <a:avLst>
+              <a:gd name="adj" fmla="val 8556"/>
+            </a:avLst>
+          </a:prstGeom>
+          <a:solidFill>
+            <a:srgbClr val="FAFBFD"/>
+          </a:solidFill>
+          <a:ln w="9525">
+            <a:solidFill>
+              <a:srgbClr val="DCE1E8"/>
+            </a:solidFill>
+          </a:ln>
+          <a:effectLst/>
+        </p:spPr>
+        <p:txBody>
+          <a:bodyPr rtlCol="0" anchor="ctr" wrap="square"/>
+          <a:lstStyle/>
+          <a:p>
+            <a:pPr algn="ctr"/>
+          </a:p>
+        </p:txBody>
+      </p:sp>
+      <p:sp>
+        <p:nvSpPr>
+          <p:cNvPr id="39" name="TextBox 38"/>
+          <p:cNvSpPr txBox="1"/>
+          <p:nvPr/>
+        </p:nvSpPr>
+        <p:spPr>
+          <a:xfrm>
+            <a:off x="6998970" y="6577012"/>
+            <a:ext cx="10050780" cy="445294"/>
+          </a:xfrm>
+          <a:prstGeom prst="rect">
+            <a:avLst/>
+          </a:prstGeom>
+          <a:noFill/>
+        </p:spPr>
+        <p:txBody>
+          <a:bodyPr wrap="square" lIns="0" rIns="0" tIns="0" bIns="0" anchor="ctr">
+            <a:spAutoFit/>
+          </a:bodyPr>
+          <a:lstStyle/>
+          <a:p>
+            <a:pPr algn="ctr">
+              <a:lnSpc>
+                <a:spcPct val="115000"/>
+              </a:lnSpc>
+            </a:pPr>
+            <a:r>
+              <a:rPr sz="1875" b="0">
+                <a:solidFill>
+                  <a:srgbClr val="3D3D3D"/>
+                </a:solidFill>
+                <a:latin typeface="Pretendard"/>
+                <a:ea typeface="Pretendard"/>
+                <a:cs typeface="Pretendard"/>
+              </a:rPr>
+              <a:t>sleep infinity — 계속 떠 있게</a:t>
+            </a:r>
+          </a:p>
+        </p:txBody>
+      </p:sp>
+      <p:sp>
+        <p:nvSpPr>
+          <p:cNvPr id="40" name="Rounded Rectangle 39"/>
+          <p:cNvSpPr/>
+          <p:nvPr/>
+        </p:nvSpPr>
+        <p:spPr>
+          <a:xfrm>
+            <a:off x="1143000" y="7098506"/>
+            <a:ext cx="5722620" cy="445294"/>
+          </a:xfrm>
+          <a:prstGeom prst="roundRect">
+            <a:avLst>
+              <a:gd name="adj" fmla="val 8556"/>
+            </a:avLst>
+          </a:prstGeom>
+          <a:solidFill>
+            <a:srgbClr val="EDF3FD"/>
+          </a:solidFill>
+          <a:ln w="9525">
+            <a:solidFill>
+              <a:srgbClr val="BFD3F5"/>
+            </a:solidFill>
+          </a:ln>
+          <a:effectLst/>
+        </p:spPr>
+        <p:txBody>
+          <a:bodyPr rtlCol="0" anchor="ctr" wrap="square"/>
+          <a:lstStyle/>
+          <a:p>
+            <a:pPr algn="ctr"/>
+          </a:p>
+        </p:txBody>
+      </p:sp>
+      <p:sp>
+        <p:nvSpPr>
+          <p:cNvPr id="41" name="TextBox 40"/>
+          <p:cNvSpPr txBox="1"/>
+          <p:nvPr/>
+        </p:nvSpPr>
+        <p:spPr>
+          <a:xfrm>
+            <a:off x="1238250" y="7098506"/>
+            <a:ext cx="5532120" cy="445294"/>
+          </a:xfrm>
+          <a:prstGeom prst="rect">
+            <a:avLst/>
+          </a:prstGeom>
+          <a:noFill/>
+        </p:spPr>
+        <p:txBody>
+          <a:bodyPr wrap="square" lIns="0" rIns="0" tIns="0" bIns="0" anchor="ctr">
+            <a:spAutoFit/>
+          </a:bodyPr>
+          <a:lstStyle/>
+          <a:p>
+            <a:pPr algn="l">
+              <a:lnSpc>
+                <a:spcPct val="115000"/>
+              </a:lnSpc>
+            </a:pPr>
+            <a:r>
+              <a:rPr sz="1875" b="1">
+                <a:solidFill>
+                  <a:srgbClr val="0D2B5E"/>
+                </a:solidFill>
+                <a:latin typeface="Pretendard"/>
+                <a:ea typeface="Pretendard"/>
+                <a:cs typeface="Pretendard"/>
+              </a:rPr>
+              <a:t>mc: volumes</a:t>
+            </a:r>
+          </a:p>
+        </p:txBody>
+      </p:sp>
+      <p:sp>
+        <p:nvSpPr>
+          <p:cNvPr id="42" name="Rounded Rectangle 41"/>
+          <p:cNvSpPr/>
+          <p:nvPr/>
+        </p:nvSpPr>
+        <p:spPr>
+          <a:xfrm>
+            <a:off x="6903720" y="7098506"/>
+            <a:ext cx="10241280" cy="445294"/>
+          </a:xfrm>
+          <a:prstGeom prst="roundRect">
+            <a:avLst>
+              <a:gd name="adj" fmla="val 8556"/>
+            </a:avLst>
+          </a:prstGeom>
+          <a:solidFill>
+            <a:srgbClr val="FAFBFD"/>
+          </a:solidFill>
+          <a:ln w="9525">
+            <a:solidFill>
+              <a:srgbClr val="DCE1E8"/>
+            </a:solidFill>
+          </a:ln>
+          <a:effectLst/>
+        </p:spPr>
+        <p:txBody>
+          <a:bodyPr rtlCol="0" anchor="ctr" wrap="square"/>
+          <a:lstStyle/>
+          <a:p>
+            <a:pPr algn="ctr"/>
+          </a:p>
+        </p:txBody>
+      </p:sp>
+      <p:sp>
+        <p:nvSpPr>
+          <p:cNvPr id="43" name="TextBox 42"/>
+          <p:cNvSpPr txBox="1"/>
+          <p:nvPr/>
+        </p:nvSpPr>
+        <p:spPr>
+          <a:xfrm>
+            <a:off x="6998970" y="7098506"/>
+            <a:ext cx="10050780" cy="445294"/>
+          </a:xfrm>
+          <a:prstGeom prst="rect">
+            <a:avLst/>
+          </a:prstGeom>
+          <a:noFill/>
+        </p:spPr>
+        <p:txBody>
+          <a:bodyPr wrap="square" lIns="0" rIns="0" tIns="0" bIns="0" anchor="ctr">
+            <a:spAutoFit/>
+          </a:bodyPr>
+          <a:lstStyle/>
+          <a:p>
+            <a:pPr algn="ctr">
+              <a:lnSpc>
+                <a:spcPct val="115000"/>
+              </a:lnSpc>
+            </a:pPr>
+            <a:r>
+              <a:rPr sz="1875" b="0">
+                <a:solidFill>
+                  <a:srgbClr val="3D3D3D"/>
+                </a:solidFill>
+                <a:latin typeface="Pretendard"/>
+                <a:ea typeface="Pretendard"/>
+                <a:cs typeface="Pretendard"/>
+              </a:rPr>
+              <a:t>./data:/data — 호스트 폴더 마운트</a:t>
+            </a:r>
+          </a:p>
+        </p:txBody>
+      </p:sp>
+      <p:sp>
+        <p:nvSpPr>
+          <p:cNvPr id="44" name="TextBox 43"/>
           <p:cNvSpPr txBox="1"/>
           <p:nvPr/>
         </p:nvSpPr>
@@ -10399,14 +10520,14 @@
                 <a:ea typeface="Pretendard"/>
                 <a:cs typeface="Pretendard"/>
               </a:rPr>
-              <a:t>확인 포인트: ps 에 minio·mc 두 컨테이너가 Up, 브라우저에 MinIO 콘솔 로그인 화면이 뜬다</a:t>
-            </a:r>
-          </a:p>
-        </p:txBody>
-      </p:sp>
-      <p:sp>
-        <p:nvSpPr>
-          <p:cNvPr id="29" name="Rectangle 28"/>
+              <a:t>MC_HOST_local = 「local 이라는 서버는 minio:9000 에 이 계정으로」 — mc 를 다시 만들어도 별칭이 남는다</a:t>
+            </a:r>
+          </a:p>
+        </p:txBody>
+      </p:sp>
+      <p:sp>
+        <p:nvSpPr>
+          <p:cNvPr id="45" name="Rectangle 44"/>
           <p:cNvSpPr/>
           <p:nvPr/>
         </p:nvSpPr>
@@ -10436,7 +10557,7 @@
       </p:sp>
       <p:sp>
         <p:nvSpPr>
-          <p:cNvPr id="30" name="TextBox 29"/>
+          <p:cNvPr id="46" name="TextBox 45"/>
           <p:cNvSpPr txBox="1"/>
           <p:nvPr/>
         </p:nvSpPr>
@@ -10477,7 +10598,7 @@
       </p:sp>
       <p:sp>
         <p:nvSpPr>
-          <p:cNvPr id="31" name="TextBox 30"/>
+          <p:cNvPr id="47" name="TextBox 46"/>
           <p:cNvSpPr txBox="1"/>
           <p:nvPr/>
         </p:nvSpPr>
@@ -10701,7 +10822,7 @@
                 <a:ea typeface="Pretendard"/>
                 <a:cs typeface="Pretendard"/>
               </a:rPr>
-              <a:t>웹 콘솔(9001) 둘러보기 — 메뉴 세 곳</a:t>
+              <a:t>웹 콘솔(9001) — SILO 로고가 뜬다</a:t>
             </a:r>
           </a:p>
         </p:txBody>
@@ -10907,7 +11028,7 @@
                 <a:ea typeface="Pretendard"/>
                 <a:cs typeface="Pretendard"/>
               </a:rPr>
-              <a:t>Object Browser</a:t>
+              <a:t>SILO 로그인 화면</a:t>
             </a:r>
           </a:p>
           <a:p>
@@ -10928,7 +11049,7 @@
                 <a:ea typeface="Pretendard"/>
                 <a:cs typeface="Pretendard"/>
               </a:rPr>
-              <a:t>버킷과 오브젝트를 보는 곳 — 지금은 비어 있다</a:t>
+              <a:t>pgsty/minio 의 이름 — MinIO 를 이어 관리하는 커뮤니티 판, 같은 콘솔</a:t>
             </a:r>
           </a:p>
         </p:txBody>
@@ -11104,7 +11225,7 @@
                 <a:ea typeface="Pretendard"/>
                 <a:cs typeface="Pretendard"/>
               </a:rPr>
-              <a:t>Monitoring → Metrics</a:t>
+              <a:t>Object Browser</a:t>
             </a:r>
           </a:p>
           <a:p>
@@ -11125,7 +11246,7 @@
                 <a:ea typeface="Pretendard"/>
                 <a:cs typeface="Pretendard"/>
               </a:rPr>
-              <a:t>용량과 요청 수</a:t>
+              <a:t>로그인 첫 화면 — 버킷과 오브젝트를 보는 곳, 지금은 비어 있다</a:t>
             </a:r>
           </a:p>
         </p:txBody>
@@ -11301,7 +11422,7 @@
                 <a:ea typeface="Pretendard"/>
                 <a:cs typeface="Pretendard"/>
               </a:rPr>
-              <a:t>Access Keys</a:t>
+              <a:t>Monitoring → Metrics</a:t>
             </a:r>
           </a:p>
           <a:p>
@@ -11322,7 +11443,7 @@
                 <a:ea typeface="Pretendard"/>
                 <a:cs typeface="Pretendard"/>
               </a:rPr>
-              <a:t>프로그램용 키를 따로 만드는 곳(심화 과제)</a:t>
+              <a:t>Administrator 아래 — 버킷·오브젝트 수·용량과 서버 상태</a:t>
             </a:r>
           </a:p>
         </p:txBody>
@@ -11498,7 +11619,7 @@
                 <a:ea typeface="Pretendard"/>
                 <a:cs typeface="Pretendard"/>
               </a:rPr>
-              <a:t>9000 과 9001</a:t>
+              <a:t>Access Keys</a:t>
             </a:r>
           </a:p>
           <a:p>
@@ -11519,7 +11640,7 @@
                 <a:ea typeface="Pretendard"/>
                 <a:cs typeface="Pretendard"/>
               </a:rPr>
-              <a:t>9000 은 프로그램이 쓰는 S3 API, 9001 은 사람이 보는 웹 콘솔</a:t>
+              <a:t>User 아래 — 프로그램용 키를 따로 만드는 곳(심화 과제)</a:t>
             </a:r>
           </a:p>
         </p:txBody>
@@ -11590,7 +11711,7 @@
                 <a:ea typeface="Pretendard"/>
                 <a:cs typeface="Pretendard"/>
               </a:rPr>
-              <a:t>minioadmin 은 기본 계정이라 실습에서만 — 운영은 반드시 바꾸고, 프로그램엔 권한을 제한한 액세스 키를 발급</a:t>
+              <a:t>minioadmin 은 기본 계정이라 실습에서만 — 운영은 반드시 바꾸고, 프로그램엔 권한을 제한한 키를</a:t>
             </a:r>
           </a:p>
         </p:txBody>
@@ -11929,59 +12050,306 @@
       </p:sp>
       <p:sp>
         <p:nvSpPr>
-          <p:cNvPr id="8" name="TextBox 7"/>
-          <p:cNvSpPr txBox="1"/>
-          <p:nvPr/>
-        </p:nvSpPr>
-        <p:spPr>
-          <a:xfrm>
-            <a:off x="1143000" y="3067050"/>
-            <a:ext cx="16002000" cy="438150"/>
-          </a:xfrm>
-          <a:prstGeom prst="rect">
-            <a:avLst/>
-          </a:prstGeom>
-          <a:noFill/>
-        </p:spPr>
-        <p:txBody>
-          <a:bodyPr wrap="square" lIns="0" rIns="0" tIns="0" bIns="0" anchor="t">
-            <a:spAutoFit/>
-          </a:bodyPr>
-          <a:lstStyle/>
-          <a:p>
-            <a:pPr algn="l">
-              <a:lnSpc>
-                <a:spcPct val="130000"/>
-              </a:lnSpc>
-            </a:pPr>
-            <a:r>
-              <a:rPr sz="2550" b="1">
-                <a:solidFill>
-                  <a:srgbClr val="3D3D3D"/>
-                </a:solidFill>
-                <a:latin typeface="Pretendard"/>
-                <a:ea typeface="Pretendard"/>
-                <a:cs typeface="Pretendard"/>
-              </a:rPr>
-              <a:t>1-5 의 「밖에서는 localhost, 안에서는 서비스 이름」— 오늘 가장 많이 만날 오류의 원인입니다</a:t>
-            </a:r>
-          </a:p>
-        </p:txBody>
-      </p:sp>
-      <p:sp>
-        <p:nvSpPr>
-          <p:cNvPr id="9" name="Rounded Rectangle 8"/>
-          <p:cNvSpPr/>
-          <p:nvPr/>
-        </p:nvSpPr>
-        <p:spPr>
-          <a:xfrm>
-            <a:off x="1143000" y="3924300"/>
-            <a:ext cx="5080000" cy="3143250"/>
+          <p:cNvPr id="8" name="Rectangle 7"/>
+          <p:cNvSpPr/>
+          <p:nvPr/>
+        </p:nvSpPr>
+        <p:spPr>
+          <a:xfrm>
+            <a:off x="1143000" y="2781300"/>
+            <a:ext cx="4442460" cy="590550"/>
+          </a:xfrm>
+          <a:prstGeom prst="rect">
+            <a:avLst/>
+          </a:prstGeom>
+          <a:solidFill>
+            <a:srgbClr val="0D2B5E"/>
+          </a:solidFill>
+          <a:ln>
+            <a:noFill/>
+          </a:ln>
+          <a:effectLst/>
+        </p:spPr>
+        <p:txBody>
+          <a:bodyPr rtlCol="0" anchor="ctr" wrap="square"/>
+          <a:lstStyle/>
+          <a:p>
+            <a:pPr algn="ctr"/>
+          </a:p>
+        </p:txBody>
+      </p:sp>
+      <p:sp>
+        <p:nvSpPr>
+          <p:cNvPr id="9" name="TextBox 8"/>
+          <p:cNvSpPr txBox="1"/>
+          <p:nvPr/>
+        </p:nvSpPr>
+        <p:spPr>
+          <a:xfrm>
+            <a:off x="1143000" y="2781300"/>
+            <a:ext cx="4442460" cy="590550"/>
+          </a:xfrm>
+          <a:prstGeom prst="rect">
+            <a:avLst/>
+          </a:prstGeom>
+          <a:noFill/>
+        </p:spPr>
+        <p:txBody>
+          <a:bodyPr wrap="square" lIns="0" rIns="0" tIns="0" bIns="0" anchor="ctr">
+            <a:spAutoFit/>
+          </a:bodyPr>
+          <a:lstStyle/>
+          <a:p>
+            <a:pPr algn="ctr">
+              <a:lnSpc>
+                <a:spcPct val="100000"/>
+              </a:lnSpc>
+            </a:pPr>
+            <a:r>
+              <a:rPr sz="2025" b="1">
+                <a:solidFill>
+                  <a:srgbClr val="FFFFFF"/>
+                </a:solidFill>
+                <a:latin typeface="Pretendard"/>
+                <a:ea typeface="Pretendard"/>
+                <a:cs typeface="Pretendard"/>
+              </a:rPr>
+              <a:t>어디서</a:t>
+            </a:r>
+          </a:p>
+        </p:txBody>
+      </p:sp>
+      <p:sp>
+        <p:nvSpPr>
+          <p:cNvPr id="10" name="Rectangle 9"/>
+          <p:cNvSpPr/>
+          <p:nvPr/>
+        </p:nvSpPr>
+        <p:spPr>
+          <a:xfrm>
+            <a:off x="5623560" y="2781300"/>
+            <a:ext cx="6362700" cy="590550"/>
+          </a:xfrm>
+          <a:prstGeom prst="rect">
+            <a:avLst/>
+          </a:prstGeom>
+          <a:solidFill>
+            <a:srgbClr val="1E5BC6"/>
+          </a:solidFill>
+          <a:ln>
+            <a:noFill/>
+          </a:ln>
+          <a:effectLst/>
+        </p:spPr>
+        <p:txBody>
+          <a:bodyPr rtlCol="0" anchor="ctr" wrap="square"/>
+          <a:lstStyle/>
+          <a:p>
+            <a:pPr algn="ctr"/>
+          </a:p>
+        </p:txBody>
+      </p:sp>
+      <p:sp>
+        <p:nvSpPr>
+          <p:cNvPr id="11" name="TextBox 10"/>
+          <p:cNvSpPr txBox="1"/>
+          <p:nvPr/>
+        </p:nvSpPr>
+        <p:spPr>
+          <a:xfrm>
+            <a:off x="5623560" y="2781300"/>
+            <a:ext cx="6362700" cy="590550"/>
+          </a:xfrm>
+          <a:prstGeom prst="rect">
+            <a:avLst/>
+          </a:prstGeom>
+          <a:noFill/>
+        </p:spPr>
+        <p:txBody>
+          <a:bodyPr wrap="square" lIns="0" rIns="0" tIns="0" bIns="0" anchor="ctr">
+            <a:spAutoFit/>
+          </a:bodyPr>
+          <a:lstStyle/>
+          <a:p>
+            <a:pPr algn="ctr">
+              <a:lnSpc>
+                <a:spcPct val="100000"/>
+              </a:lnSpc>
+            </a:pPr>
+            <a:r>
+              <a:rPr sz="2025" b="1">
+                <a:solidFill>
+                  <a:srgbClr val="FFFFFF"/>
+                </a:solidFill>
+                <a:latin typeface="Pretendard"/>
+                <a:ea typeface="Pretendard"/>
+                <a:cs typeface="Pretendard"/>
+              </a:rPr>
+              <a:t>명령</a:t>
+            </a:r>
+          </a:p>
+        </p:txBody>
+      </p:sp>
+      <p:sp>
+        <p:nvSpPr>
+          <p:cNvPr id="12" name="Rectangle 11"/>
+          <p:cNvSpPr/>
+          <p:nvPr/>
+        </p:nvSpPr>
+        <p:spPr>
+          <a:xfrm>
+            <a:off x="12024360" y="2781300"/>
+            <a:ext cx="5120640" cy="590550"/>
+          </a:xfrm>
+          <a:prstGeom prst="rect">
+            <a:avLst/>
+          </a:prstGeom>
+          <a:solidFill>
+            <a:srgbClr val="1E5BC6"/>
+          </a:solidFill>
+          <a:ln>
+            <a:noFill/>
+          </a:ln>
+          <a:effectLst/>
+        </p:spPr>
+        <p:txBody>
+          <a:bodyPr rtlCol="0" anchor="ctr" wrap="square"/>
+          <a:lstStyle/>
+          <a:p>
+            <a:pPr algn="ctr"/>
+          </a:p>
+        </p:txBody>
+      </p:sp>
+      <p:sp>
+        <p:nvSpPr>
+          <p:cNvPr id="13" name="TextBox 12"/>
+          <p:cNvSpPr txBox="1"/>
+          <p:nvPr/>
+        </p:nvSpPr>
+        <p:spPr>
+          <a:xfrm>
+            <a:off x="12024360" y="2781300"/>
+            <a:ext cx="5120640" cy="590550"/>
+          </a:xfrm>
+          <a:prstGeom prst="rect">
+            <a:avLst/>
+          </a:prstGeom>
+          <a:noFill/>
+        </p:spPr>
+        <p:txBody>
+          <a:bodyPr wrap="square" lIns="0" rIns="0" tIns="0" bIns="0" anchor="ctr">
+            <a:spAutoFit/>
+          </a:bodyPr>
+          <a:lstStyle/>
+          <a:p>
+            <a:pPr algn="ctr">
+              <a:lnSpc>
+                <a:spcPct val="100000"/>
+              </a:lnSpc>
+            </a:pPr>
+            <a:r>
+              <a:rPr sz="2025" b="1">
+                <a:solidFill>
+                  <a:srgbClr val="FFFFFF"/>
+                </a:solidFill>
+                <a:latin typeface="Pretendard"/>
+                <a:ea typeface="Pretendard"/>
+                <a:cs typeface="Pretendard"/>
+              </a:rPr>
+              <a:t>결과</a:t>
+            </a:r>
+          </a:p>
+        </p:txBody>
+      </p:sp>
+      <p:sp>
+        <p:nvSpPr>
+          <p:cNvPr id="14" name="Rounded Rectangle 13"/>
+          <p:cNvSpPr/>
+          <p:nvPr/>
+        </p:nvSpPr>
+        <p:spPr>
+          <a:xfrm>
+            <a:off x="1143000" y="3448050"/>
+            <a:ext cx="4442460" cy="647700"/>
           </a:xfrm>
           <a:prstGeom prst="roundRect">
             <a:avLst>
-              <a:gd name="adj" fmla="val 1515"/>
+              <a:gd name="adj" fmla="val 5882"/>
+            </a:avLst>
+          </a:prstGeom>
+          <a:solidFill>
+            <a:srgbClr val="EDF3FD"/>
+          </a:solidFill>
+          <a:ln w="9525">
+            <a:solidFill>
+              <a:srgbClr val="BFD3F5"/>
+            </a:solidFill>
+          </a:ln>
+          <a:effectLst/>
+        </p:spPr>
+        <p:txBody>
+          <a:bodyPr rtlCol="0" anchor="ctr" wrap="square"/>
+          <a:lstStyle/>
+          <a:p>
+            <a:pPr algn="ctr"/>
+          </a:p>
+        </p:txBody>
+      </p:sp>
+      <p:sp>
+        <p:nvSpPr>
+          <p:cNvPr id="15" name="TextBox 14"/>
+          <p:cNvSpPr txBox="1"/>
+          <p:nvPr/>
+        </p:nvSpPr>
+        <p:spPr>
+          <a:xfrm>
+            <a:off x="1238250" y="3448050"/>
+            <a:ext cx="4251960" cy="647700"/>
+          </a:xfrm>
+          <a:prstGeom prst="rect">
+            <a:avLst/>
+          </a:prstGeom>
+          <a:noFill/>
+        </p:spPr>
+        <p:txBody>
+          <a:bodyPr wrap="square" lIns="0" rIns="0" tIns="0" bIns="0" anchor="ctr">
+            <a:spAutoFit/>
+          </a:bodyPr>
+          <a:lstStyle/>
+          <a:p>
+            <a:pPr algn="l">
+              <a:lnSpc>
+                <a:spcPct val="115000"/>
+              </a:lnSpc>
+            </a:pPr>
+            <a:r>
+              <a:rPr sz="1875" b="1">
+                <a:solidFill>
+                  <a:srgbClr val="0D2B5E"/>
+                </a:solidFill>
+                <a:latin typeface="Pretendard"/>
+                <a:ea typeface="Pretendard"/>
+                <a:cs typeface="Pretendard"/>
+              </a:rPr>
+              <a:t>① 내 컴퓨터</a:t>
+            </a:r>
+          </a:p>
+        </p:txBody>
+      </p:sp>
+      <p:sp>
+        <p:nvSpPr>
+          <p:cNvPr id="16" name="Rounded Rectangle 15"/>
+          <p:cNvSpPr/>
+          <p:nvPr/>
+        </p:nvSpPr>
+        <p:spPr>
+          <a:xfrm>
+            <a:off x="5623560" y="3448050"/>
+            <a:ext cx="6362700" cy="647700"/>
+          </a:xfrm>
+          <a:prstGeom prst="roundRect">
+            <a:avLst>
+              <a:gd name="adj" fmla="val 5882"/>
             </a:avLst>
           </a:prstGeom>
           <a:solidFill>
@@ -12004,104 +12372,51 @@
       </p:sp>
       <p:sp>
         <p:nvSpPr>
-          <p:cNvPr id="10" name="Rectangle 9"/>
-          <p:cNvSpPr/>
-          <p:nvPr/>
-        </p:nvSpPr>
-        <p:spPr>
-          <a:xfrm>
-            <a:off x="1143000" y="3924300"/>
-            <a:ext cx="5080000" cy="914400"/>
-          </a:xfrm>
-          <a:prstGeom prst="rect">
-            <a:avLst/>
-          </a:prstGeom>
-          <a:solidFill>
-            <a:srgbClr val="0D2B5E"/>
-          </a:solidFill>
-          <a:ln>
-            <a:noFill/>
-          </a:ln>
-          <a:effectLst/>
-        </p:spPr>
-        <p:txBody>
-          <a:bodyPr rtlCol="0" anchor="ctr" wrap="square"/>
-          <a:lstStyle/>
-          <a:p>
-            <a:pPr algn="ctr"/>
-          </a:p>
-        </p:txBody>
-      </p:sp>
-      <p:sp>
-        <p:nvSpPr>
-          <p:cNvPr id="11" name="TextBox 10"/>
-          <p:cNvSpPr txBox="1"/>
-          <p:nvPr/>
-        </p:nvSpPr>
-        <p:spPr>
-          <a:xfrm>
-            <a:off x="1143000" y="4171950"/>
-            <a:ext cx="5080000" cy="419100"/>
-          </a:xfrm>
-          <a:prstGeom prst="rect">
-            <a:avLst/>
-          </a:prstGeom>
-          <a:noFill/>
-        </p:spPr>
-        <p:txBody>
-          <a:bodyPr wrap="square" lIns="0" rIns="0" tIns="0" bIns="0" anchor="t">
+          <p:cNvPr id="17" name="TextBox 16"/>
+          <p:cNvSpPr txBox="1"/>
+          <p:nvPr/>
+        </p:nvSpPr>
+        <p:spPr>
+          <a:xfrm>
+            <a:off x="5718810" y="3448050"/>
+            <a:ext cx="6172200" cy="647700"/>
+          </a:xfrm>
+          <a:prstGeom prst="rect">
+            <a:avLst/>
+          </a:prstGeom>
+          <a:noFill/>
+        </p:spPr>
+        <p:txBody>
+          <a:bodyPr wrap="square" lIns="0" rIns="0" tIns="0" bIns="0" anchor="ctr">
             <a:spAutoFit/>
           </a:bodyPr>
           <a:lstStyle/>
           <a:p>
             <a:pPr algn="ctr">
               <a:lnSpc>
-                <a:spcPct val="100000"/>
-              </a:lnSpc>
-            </a:pPr>
-            <a:r>
-              <a:rPr sz="2475" b="1">
-                <a:solidFill>
-                  <a:srgbClr val="FFFFFF"/>
-                </a:solidFill>
-                <a:latin typeface="Pretendard"/>
-                <a:ea typeface="Pretendard"/>
-                <a:cs typeface="Pretendard"/>
-              </a:rPr>
-              <a:t>① 호스트에서</a:t>
-            </a:r>
-          </a:p>
-        </p:txBody>
-      </p:sp>
-      <p:sp>
-        <p:nvSpPr>
-          <p:cNvPr id="12" name="TextBox 11"/>
-          <p:cNvSpPr txBox="1"/>
-          <p:nvPr/>
-        </p:nvSpPr>
-        <p:spPr>
-          <a:xfrm>
-            <a:off x="1352550" y="5143500"/>
-            <a:ext cx="4660900" cy="1524000"/>
-          </a:xfrm>
-          <a:prstGeom prst="rect">
-            <a:avLst/>
-          </a:prstGeom>
-          <a:noFill/>
-        </p:spPr>
-        <p:txBody>
-          <a:bodyPr wrap="square" lIns="0" rIns="0" tIns="0" bIns="0" anchor="t">
-            <a:spAutoFit/>
-          </a:bodyPr>
-          <a:lstStyle/>
+                <a:spcPct val="115000"/>
+              </a:lnSpc>
+            </a:pPr>
+            <a:r>
+              <a:rPr sz="1875" b="0">
+                <a:solidFill>
+                  <a:srgbClr val="3D3D3D"/>
+                </a:solidFill>
+                <a:latin typeface="Pretendard"/>
+                <a:ea typeface="Pretendard"/>
+                <a:cs typeface="Pretendard"/>
+              </a:rPr>
+              <a:t>curl … localhost:9000</a:t>
+            </a:r>
+          </a:p>
           <a:p>
             <a:pPr algn="ctr">
               <a:lnSpc>
-                <a:spcPct val="146000"/>
-              </a:lnSpc>
-            </a:pPr>
-            <a:r>
-              <a:rPr sz="2100" b="0">
+                <a:spcPct val="115000"/>
+              </a:lnSpc>
+            </a:pPr>
+            <a:r>
+              <a:rPr sz="1875" b="0">
                 <a:solidFill>
                   <a:srgbClr val="3D3D3D"/>
                 </a:solidFill>
@@ -12109,43 +12424,25 @@
                 <a:ea typeface="Pretendard"/>
                 <a:cs typeface="Pretendard"/>
               </a:rPr>
-              <a:t>curl localhost:9000</a:t>
-            </a:r>
-          </a:p>
-          <a:p>
-            <a:pPr algn="ctr">
-              <a:lnSpc>
-                <a:spcPct val="146000"/>
-              </a:lnSpc>
-            </a:pPr>
-            <a:r>
-              <a:rPr sz="2100" b="0">
-                <a:solidFill>
-                  <a:srgbClr val="3D3D3D"/>
-                </a:solidFill>
-                <a:latin typeface="Pretendard"/>
-                <a:ea typeface="Pretendard"/>
-                <a:cs typeface="Pretendard"/>
-              </a:rPr>
-              <a:t>→ 200</a:t>
-            </a:r>
-          </a:p>
-        </p:txBody>
-      </p:sp>
-      <p:sp>
-        <p:nvSpPr>
-          <p:cNvPr id="13" name="Rounded Rectangle 12"/>
-          <p:cNvSpPr/>
-          <p:nvPr/>
-        </p:nvSpPr>
-        <p:spPr>
-          <a:xfrm>
-            <a:off x="6604000" y="3924300"/>
-            <a:ext cx="5080000" cy="3143250"/>
+              <a:t>/minio/health/live</a:t>
+            </a:r>
+          </a:p>
+        </p:txBody>
+      </p:sp>
+      <p:sp>
+        <p:nvSpPr>
+          <p:cNvPr id="18" name="Rounded Rectangle 17"/>
+          <p:cNvSpPr/>
+          <p:nvPr/>
+        </p:nvSpPr>
+        <p:spPr>
+          <a:xfrm>
+            <a:off x="12024360" y="3448050"/>
+            <a:ext cx="5120640" cy="647700"/>
           </a:xfrm>
           <a:prstGeom prst="roundRect">
             <a:avLst>
-              <a:gd name="adj" fmla="val 1515"/>
+              <a:gd name="adj" fmla="val 5882"/>
             </a:avLst>
           </a:prstGeom>
           <a:solidFill>
@@ -12168,104 +12465,33 @@
       </p:sp>
       <p:sp>
         <p:nvSpPr>
-          <p:cNvPr id="14" name="Rectangle 13"/>
-          <p:cNvSpPr/>
-          <p:nvPr/>
-        </p:nvSpPr>
-        <p:spPr>
-          <a:xfrm>
-            <a:off x="6604000" y="3924300"/>
-            <a:ext cx="5080000" cy="914400"/>
-          </a:xfrm>
-          <a:prstGeom prst="rect">
-            <a:avLst/>
-          </a:prstGeom>
-          <a:solidFill>
-            <a:srgbClr val="1E5BC6"/>
-          </a:solidFill>
-          <a:ln>
-            <a:noFill/>
-          </a:ln>
-          <a:effectLst/>
-        </p:spPr>
-        <p:txBody>
-          <a:bodyPr rtlCol="0" anchor="ctr" wrap="square"/>
-          <a:lstStyle/>
-          <a:p>
-            <a:pPr algn="ctr"/>
-          </a:p>
-        </p:txBody>
-      </p:sp>
-      <p:sp>
-        <p:nvSpPr>
-          <p:cNvPr id="15" name="TextBox 14"/>
-          <p:cNvSpPr txBox="1"/>
-          <p:nvPr/>
-        </p:nvSpPr>
-        <p:spPr>
-          <a:xfrm>
-            <a:off x="6604000" y="4171950"/>
-            <a:ext cx="5080000" cy="419100"/>
-          </a:xfrm>
-          <a:prstGeom prst="rect">
-            <a:avLst/>
-          </a:prstGeom>
-          <a:noFill/>
-        </p:spPr>
-        <p:txBody>
-          <a:bodyPr wrap="square" lIns="0" rIns="0" tIns="0" bIns="0" anchor="t">
+          <p:cNvPr id="19" name="TextBox 18"/>
+          <p:cNvSpPr txBox="1"/>
+          <p:nvPr/>
+        </p:nvSpPr>
+        <p:spPr>
+          <a:xfrm>
+            <a:off x="12119610" y="3448050"/>
+            <a:ext cx="4930140" cy="647700"/>
+          </a:xfrm>
+          <a:prstGeom prst="rect">
+            <a:avLst/>
+          </a:prstGeom>
+          <a:noFill/>
+        </p:spPr>
+        <p:txBody>
+          <a:bodyPr wrap="square" lIns="0" rIns="0" tIns="0" bIns="0" anchor="ctr">
             <a:spAutoFit/>
           </a:bodyPr>
           <a:lstStyle/>
           <a:p>
             <a:pPr algn="ctr">
               <a:lnSpc>
-                <a:spcPct val="100000"/>
-              </a:lnSpc>
-            </a:pPr>
-            <a:r>
-              <a:rPr sz="2475" b="1">
-                <a:solidFill>
-                  <a:srgbClr val="FFFFFF"/>
-                </a:solidFill>
-                <a:latin typeface="Pretendard"/>
-                <a:ea typeface="Pretendard"/>
-                <a:cs typeface="Pretendard"/>
-              </a:rPr>
-              <a:t>② mc 안에서</a:t>
-            </a:r>
-          </a:p>
-        </p:txBody>
-      </p:sp>
-      <p:sp>
-        <p:nvSpPr>
-          <p:cNvPr id="16" name="TextBox 15"/>
-          <p:cNvSpPr txBox="1"/>
-          <p:nvPr/>
-        </p:nvSpPr>
-        <p:spPr>
-          <a:xfrm>
-            <a:off x="6813550" y="5143500"/>
-            <a:ext cx="4660900" cy="1524000"/>
-          </a:xfrm>
-          <a:prstGeom prst="rect">
-            <a:avLst/>
-          </a:prstGeom>
-          <a:noFill/>
-        </p:spPr>
-        <p:txBody>
-          <a:bodyPr wrap="square" lIns="0" rIns="0" tIns="0" bIns="0" anchor="t">
-            <a:spAutoFit/>
-          </a:bodyPr>
-          <a:lstStyle/>
-          <a:p>
-            <a:pPr algn="ctr">
-              <a:lnSpc>
-                <a:spcPct val="146000"/>
-              </a:lnSpc>
-            </a:pPr>
-            <a:r>
-              <a:rPr sz="2100" b="0">
+                <a:spcPct val="115000"/>
+              </a:lnSpc>
+            </a:pPr>
+            <a:r>
+              <a:rPr sz="1875" b="0">
                 <a:solidFill>
                   <a:srgbClr val="3D3D3D"/>
                 </a:solidFill>
@@ -12273,43 +12499,100 @@
                 <a:ea typeface="Pretendard"/>
                 <a:cs typeface="Pretendard"/>
               </a:rPr>
-              <a:t>wget minio:9000</a:t>
-            </a:r>
-          </a:p>
-          <a:p>
-            <a:pPr algn="ctr">
-              <a:lnSpc>
-                <a:spcPct val="146000"/>
-              </a:lnSpc>
-            </a:pPr>
-            <a:r>
-              <a:rPr sz="2100" b="0">
-                <a:solidFill>
-                  <a:srgbClr val="3D3D3D"/>
-                </a:solidFill>
-                <a:latin typeface="Pretendard"/>
-                <a:ea typeface="Pretendard"/>
-                <a:cs typeface="Pretendard"/>
-              </a:rPr>
-              <a:t>→ 성공</a:t>
-            </a:r>
-          </a:p>
-        </p:txBody>
-      </p:sp>
-      <p:sp>
-        <p:nvSpPr>
-          <p:cNvPr id="17" name="Rounded Rectangle 16"/>
-          <p:cNvSpPr/>
-          <p:nvPr/>
-        </p:nvSpPr>
-        <p:spPr>
-          <a:xfrm>
-            <a:off x="12065000" y="3924300"/>
-            <a:ext cx="5080000" cy="3143250"/>
+              <a:t>호스트에서 9000: 200</a:t>
+            </a:r>
+          </a:p>
+        </p:txBody>
+      </p:sp>
+      <p:sp>
+        <p:nvSpPr>
+          <p:cNvPr id="20" name="Rounded Rectangle 19"/>
+          <p:cNvSpPr/>
+          <p:nvPr/>
+        </p:nvSpPr>
+        <p:spPr>
+          <a:xfrm>
+            <a:off x="1143000" y="4171950"/>
+            <a:ext cx="4442460" cy="647700"/>
           </a:xfrm>
           <a:prstGeom prst="roundRect">
             <a:avLst>
-              <a:gd name="adj" fmla="val 1515"/>
+              <a:gd name="adj" fmla="val 5882"/>
+            </a:avLst>
+          </a:prstGeom>
+          <a:solidFill>
+            <a:srgbClr val="EDF3FD"/>
+          </a:solidFill>
+          <a:ln w="9525">
+            <a:solidFill>
+              <a:srgbClr val="BFD3F5"/>
+            </a:solidFill>
+          </a:ln>
+          <a:effectLst/>
+        </p:spPr>
+        <p:txBody>
+          <a:bodyPr rtlCol="0" anchor="ctr" wrap="square"/>
+          <a:lstStyle/>
+          <a:p>
+            <a:pPr algn="ctr"/>
+          </a:p>
+        </p:txBody>
+      </p:sp>
+      <p:sp>
+        <p:nvSpPr>
+          <p:cNvPr id="21" name="TextBox 20"/>
+          <p:cNvSpPr txBox="1"/>
+          <p:nvPr/>
+        </p:nvSpPr>
+        <p:spPr>
+          <a:xfrm>
+            <a:off x="1238250" y="4171950"/>
+            <a:ext cx="4251960" cy="647700"/>
+          </a:xfrm>
+          <a:prstGeom prst="rect">
+            <a:avLst/>
+          </a:prstGeom>
+          <a:noFill/>
+        </p:spPr>
+        <p:txBody>
+          <a:bodyPr wrap="square" lIns="0" rIns="0" tIns="0" bIns="0" anchor="ctr">
+            <a:spAutoFit/>
+          </a:bodyPr>
+          <a:lstStyle/>
+          <a:p>
+            <a:pPr algn="l">
+              <a:lnSpc>
+                <a:spcPct val="115000"/>
+              </a:lnSpc>
+            </a:pPr>
+            <a:r>
+              <a:rPr sz="1875" b="1">
+                <a:solidFill>
+                  <a:srgbClr val="0D2B5E"/>
+                </a:solidFill>
+                <a:latin typeface="Pretendard"/>
+                <a:ea typeface="Pretendard"/>
+                <a:cs typeface="Pretendard"/>
+              </a:rPr>
+              <a:t>② mc 안 → minio</a:t>
+            </a:r>
+          </a:p>
+        </p:txBody>
+      </p:sp>
+      <p:sp>
+        <p:nvSpPr>
+          <p:cNvPr id="22" name="Rounded Rectangle 21"/>
+          <p:cNvSpPr/>
+          <p:nvPr/>
+        </p:nvSpPr>
+        <p:spPr>
+          <a:xfrm>
+            <a:off x="5623560" y="4171950"/>
+            <a:ext cx="6362700" cy="647700"/>
+          </a:xfrm>
+          <a:prstGeom prst="roundRect">
+            <a:avLst>
+              <a:gd name="adj" fmla="val 5882"/>
             </a:avLst>
           </a:prstGeom>
           <a:solidFill>
@@ -12332,20 +12615,492 @@
       </p:sp>
       <p:sp>
         <p:nvSpPr>
-          <p:cNvPr id="18" name="Rectangle 17"/>
-          <p:cNvSpPr/>
-          <p:nvPr/>
-        </p:nvSpPr>
-        <p:spPr>
-          <a:xfrm>
-            <a:off x="12065000" y="3924300"/>
-            <a:ext cx="5080000" cy="914400"/>
-          </a:xfrm>
-          <a:prstGeom prst="rect">
-            <a:avLst/>
-          </a:prstGeom>
-          <a:solidFill>
-            <a:srgbClr val="0D2B5E"/>
+          <p:cNvPr id="23" name="TextBox 22"/>
+          <p:cNvSpPr txBox="1"/>
+          <p:nvPr/>
+        </p:nvSpPr>
+        <p:spPr>
+          <a:xfrm>
+            <a:off x="5718810" y="4171950"/>
+            <a:ext cx="6172200" cy="647700"/>
+          </a:xfrm>
+          <a:prstGeom prst="rect">
+            <a:avLst/>
+          </a:prstGeom>
+          <a:noFill/>
+        </p:spPr>
+        <p:txBody>
+          <a:bodyPr wrap="square" lIns="0" rIns="0" tIns="0" bIns="0" anchor="ctr">
+            <a:spAutoFit/>
+          </a:bodyPr>
+          <a:lstStyle/>
+          <a:p>
+            <a:pPr algn="ctr">
+              <a:lnSpc>
+                <a:spcPct val="115000"/>
+              </a:lnSpc>
+            </a:pPr>
+            <a:r>
+              <a:rPr sz="1875" b="0">
+                <a:solidFill>
+                  <a:srgbClr val="3D3D3D"/>
+                </a:solidFill>
+                <a:latin typeface="Pretendard"/>
+                <a:ea typeface="Pretendard"/>
+                <a:cs typeface="Pretendard"/>
+              </a:rPr>
+              <a:t>mc alias set test</a:t>
+            </a:r>
+          </a:p>
+          <a:p>
+            <a:pPr algn="ctr">
+              <a:lnSpc>
+                <a:spcPct val="115000"/>
+              </a:lnSpc>
+            </a:pPr>
+            <a:r>
+              <a:rPr sz="1875" b="0">
+                <a:solidFill>
+                  <a:srgbClr val="3D3D3D"/>
+                </a:solidFill>
+                <a:latin typeface="Pretendard"/>
+                <a:ea typeface="Pretendard"/>
+                <a:cs typeface="Pretendard"/>
+              </a:rPr>
+              <a:t>http://minio:9000 …</a:t>
+            </a:r>
+          </a:p>
+        </p:txBody>
+      </p:sp>
+      <p:sp>
+        <p:nvSpPr>
+          <p:cNvPr id="24" name="Rounded Rectangle 23"/>
+          <p:cNvSpPr/>
+          <p:nvPr/>
+        </p:nvSpPr>
+        <p:spPr>
+          <a:xfrm>
+            <a:off x="12024360" y="4171950"/>
+            <a:ext cx="5120640" cy="647700"/>
+          </a:xfrm>
+          <a:prstGeom prst="roundRect">
+            <a:avLst>
+              <a:gd name="adj" fmla="val 5882"/>
+            </a:avLst>
+          </a:prstGeom>
+          <a:solidFill>
+            <a:srgbClr val="FAFBFD"/>
+          </a:solidFill>
+          <a:ln w="9525">
+            <a:solidFill>
+              <a:srgbClr val="DCE1E8"/>
+            </a:solidFill>
+          </a:ln>
+          <a:effectLst/>
+        </p:spPr>
+        <p:txBody>
+          <a:bodyPr rtlCol="0" anchor="ctr" wrap="square"/>
+          <a:lstStyle/>
+          <a:p>
+            <a:pPr algn="ctr"/>
+          </a:p>
+        </p:txBody>
+      </p:sp>
+      <p:sp>
+        <p:nvSpPr>
+          <p:cNvPr id="25" name="TextBox 24"/>
+          <p:cNvSpPr txBox="1"/>
+          <p:nvPr/>
+        </p:nvSpPr>
+        <p:spPr>
+          <a:xfrm>
+            <a:off x="12119610" y="4171950"/>
+            <a:ext cx="4930140" cy="647700"/>
+          </a:xfrm>
+          <a:prstGeom prst="rect">
+            <a:avLst/>
+          </a:prstGeom>
+          <a:noFill/>
+        </p:spPr>
+        <p:txBody>
+          <a:bodyPr wrap="square" lIns="0" rIns="0" tIns="0" bIns="0" anchor="ctr">
+            <a:spAutoFit/>
+          </a:bodyPr>
+          <a:lstStyle/>
+          <a:p>
+            <a:pPr algn="ctr">
+              <a:lnSpc>
+                <a:spcPct val="115000"/>
+              </a:lnSpc>
+            </a:pPr>
+            <a:r>
+              <a:rPr sz="1875" b="0">
+                <a:solidFill>
+                  <a:srgbClr val="3D3D3D"/>
+                </a:solidFill>
+                <a:latin typeface="Pretendard"/>
+                <a:ea typeface="Pretendard"/>
+                <a:cs typeface="Pretendard"/>
+              </a:rPr>
+              <a:t>Added `test`</a:t>
+            </a:r>
+          </a:p>
+          <a:p>
+            <a:pPr algn="ctr">
+              <a:lnSpc>
+                <a:spcPct val="115000"/>
+              </a:lnSpc>
+            </a:pPr>
+            <a:r>
+              <a:rPr sz="1875" b="0">
+                <a:solidFill>
+                  <a:srgbClr val="3D3D3D"/>
+                </a:solidFill>
+                <a:latin typeface="Pretendard"/>
+                <a:ea typeface="Pretendard"/>
+                <a:cs typeface="Pretendard"/>
+              </a:rPr>
+              <a:t>successfully.</a:t>
+            </a:r>
+          </a:p>
+        </p:txBody>
+      </p:sp>
+      <p:sp>
+        <p:nvSpPr>
+          <p:cNvPr id="26" name="Rounded Rectangle 25"/>
+          <p:cNvSpPr/>
+          <p:nvPr/>
+        </p:nvSpPr>
+        <p:spPr>
+          <a:xfrm>
+            <a:off x="1143000" y="4895850"/>
+            <a:ext cx="4442460" cy="647700"/>
+          </a:xfrm>
+          <a:prstGeom prst="roundRect">
+            <a:avLst>
+              <a:gd name="adj" fmla="val 5882"/>
+            </a:avLst>
+          </a:prstGeom>
+          <a:solidFill>
+            <a:srgbClr val="EDF3FD"/>
+          </a:solidFill>
+          <a:ln w="9525">
+            <a:solidFill>
+              <a:srgbClr val="BFD3F5"/>
+            </a:solidFill>
+          </a:ln>
+          <a:effectLst/>
+        </p:spPr>
+        <p:txBody>
+          <a:bodyPr rtlCol="0" anchor="ctr" wrap="square"/>
+          <a:lstStyle/>
+          <a:p>
+            <a:pPr algn="ctr"/>
+          </a:p>
+        </p:txBody>
+      </p:sp>
+      <p:sp>
+        <p:nvSpPr>
+          <p:cNvPr id="27" name="TextBox 26"/>
+          <p:cNvSpPr txBox="1"/>
+          <p:nvPr/>
+        </p:nvSpPr>
+        <p:spPr>
+          <a:xfrm>
+            <a:off x="1238250" y="4895850"/>
+            <a:ext cx="4251960" cy="647700"/>
+          </a:xfrm>
+          <a:prstGeom prst="rect">
+            <a:avLst/>
+          </a:prstGeom>
+          <a:noFill/>
+        </p:spPr>
+        <p:txBody>
+          <a:bodyPr wrap="square" lIns="0" rIns="0" tIns="0" bIns="0" anchor="ctr">
+            <a:spAutoFit/>
+          </a:bodyPr>
+          <a:lstStyle/>
+          <a:p>
+            <a:pPr algn="l">
+              <a:lnSpc>
+                <a:spcPct val="115000"/>
+              </a:lnSpc>
+            </a:pPr>
+            <a:r>
+              <a:rPr sz="1875" b="1">
+                <a:solidFill>
+                  <a:srgbClr val="0D2B5E"/>
+                </a:solidFill>
+                <a:latin typeface="Pretendard"/>
+                <a:ea typeface="Pretendard"/>
+                <a:cs typeface="Pretendard"/>
+              </a:rPr>
+              <a:t>③ mc 안 → localhost</a:t>
+            </a:r>
+          </a:p>
+          <a:p>
+            <a:pPr algn="l">
+              <a:lnSpc>
+                <a:spcPct val="115000"/>
+              </a:lnSpc>
+            </a:pPr>
+            <a:r>
+              <a:rPr sz="1875" b="1">
+                <a:solidFill>
+                  <a:srgbClr val="0D2B5E"/>
+                </a:solidFill>
+                <a:latin typeface="Pretendard"/>
+                <a:ea typeface="Pretendard"/>
+                <a:cs typeface="Pretendard"/>
+              </a:rPr>
+              <a:t>(일부러 실패)</a:t>
+            </a:r>
+          </a:p>
+        </p:txBody>
+      </p:sp>
+      <p:sp>
+        <p:nvSpPr>
+          <p:cNvPr id="28" name="Rounded Rectangle 27"/>
+          <p:cNvSpPr/>
+          <p:nvPr/>
+        </p:nvSpPr>
+        <p:spPr>
+          <a:xfrm>
+            <a:off x="5623560" y="4895850"/>
+            <a:ext cx="6362700" cy="647700"/>
+          </a:xfrm>
+          <a:prstGeom prst="roundRect">
+            <a:avLst>
+              <a:gd name="adj" fmla="val 5882"/>
+            </a:avLst>
+          </a:prstGeom>
+          <a:solidFill>
+            <a:srgbClr val="FAFBFD"/>
+          </a:solidFill>
+          <a:ln w="9525">
+            <a:solidFill>
+              <a:srgbClr val="DCE1E8"/>
+            </a:solidFill>
+          </a:ln>
+          <a:effectLst/>
+        </p:spPr>
+        <p:txBody>
+          <a:bodyPr rtlCol="0" anchor="ctr" wrap="square"/>
+          <a:lstStyle/>
+          <a:p>
+            <a:pPr algn="ctr"/>
+          </a:p>
+        </p:txBody>
+      </p:sp>
+      <p:sp>
+        <p:nvSpPr>
+          <p:cNvPr id="29" name="TextBox 28"/>
+          <p:cNvSpPr txBox="1"/>
+          <p:nvPr/>
+        </p:nvSpPr>
+        <p:spPr>
+          <a:xfrm>
+            <a:off x="5718810" y="4895850"/>
+            <a:ext cx="6172200" cy="647700"/>
+          </a:xfrm>
+          <a:prstGeom prst="rect">
+            <a:avLst/>
+          </a:prstGeom>
+          <a:noFill/>
+        </p:spPr>
+        <p:txBody>
+          <a:bodyPr wrap="square" lIns="0" rIns="0" tIns="0" bIns="0" anchor="ctr">
+            <a:spAutoFit/>
+          </a:bodyPr>
+          <a:lstStyle/>
+          <a:p>
+            <a:pPr algn="ctr">
+              <a:lnSpc>
+                <a:spcPct val="115000"/>
+              </a:lnSpc>
+            </a:pPr>
+            <a:r>
+              <a:rPr sz="1875" b="0">
+                <a:solidFill>
+                  <a:srgbClr val="3D3D3D"/>
+                </a:solidFill>
+                <a:latin typeface="Pretendard"/>
+                <a:ea typeface="Pretendard"/>
+                <a:cs typeface="Pretendard"/>
+              </a:rPr>
+              <a:t>mc alias set test2</a:t>
+            </a:r>
+          </a:p>
+          <a:p>
+            <a:pPr algn="ctr">
+              <a:lnSpc>
+                <a:spcPct val="115000"/>
+              </a:lnSpc>
+            </a:pPr>
+            <a:r>
+              <a:rPr sz="1875" b="0">
+                <a:solidFill>
+                  <a:srgbClr val="3D3D3D"/>
+                </a:solidFill>
+                <a:latin typeface="Pretendard"/>
+                <a:ea typeface="Pretendard"/>
+                <a:cs typeface="Pretendard"/>
+              </a:rPr>
+              <a:t>http://localhost:9000</a:t>
+            </a:r>
+          </a:p>
+        </p:txBody>
+      </p:sp>
+      <p:sp>
+        <p:nvSpPr>
+          <p:cNvPr id="30" name="Rounded Rectangle 29"/>
+          <p:cNvSpPr/>
+          <p:nvPr/>
+        </p:nvSpPr>
+        <p:spPr>
+          <a:xfrm>
+            <a:off x="12024360" y="4895850"/>
+            <a:ext cx="5120640" cy="647700"/>
+          </a:xfrm>
+          <a:prstGeom prst="roundRect">
+            <a:avLst>
+              <a:gd name="adj" fmla="val 5882"/>
+            </a:avLst>
+          </a:prstGeom>
+          <a:solidFill>
+            <a:srgbClr val="FAFBFD"/>
+          </a:solidFill>
+          <a:ln w="9525">
+            <a:solidFill>
+              <a:srgbClr val="DCE1E8"/>
+            </a:solidFill>
+          </a:ln>
+          <a:effectLst/>
+        </p:spPr>
+        <p:txBody>
+          <a:bodyPr rtlCol="0" anchor="ctr" wrap="square"/>
+          <a:lstStyle/>
+          <a:p>
+            <a:pPr algn="ctr"/>
+          </a:p>
+        </p:txBody>
+      </p:sp>
+      <p:sp>
+        <p:nvSpPr>
+          <p:cNvPr id="31" name="TextBox 30"/>
+          <p:cNvSpPr txBox="1"/>
+          <p:nvPr/>
+        </p:nvSpPr>
+        <p:spPr>
+          <a:xfrm>
+            <a:off x="12119610" y="4895850"/>
+            <a:ext cx="4930140" cy="647700"/>
+          </a:xfrm>
+          <a:prstGeom prst="rect">
+            <a:avLst/>
+          </a:prstGeom>
+          <a:noFill/>
+        </p:spPr>
+        <p:txBody>
+          <a:bodyPr wrap="square" lIns="0" rIns="0" tIns="0" bIns="0" anchor="ctr">
+            <a:spAutoFit/>
+          </a:bodyPr>
+          <a:lstStyle/>
+          <a:p>
+            <a:pPr algn="ctr">
+              <a:lnSpc>
+                <a:spcPct val="115000"/>
+              </a:lnSpc>
+            </a:pPr>
+            <a:r>
+              <a:rPr sz="1875" b="0">
+                <a:solidFill>
+                  <a:srgbClr val="3D3D3D"/>
+                </a:solidFill>
+                <a:latin typeface="Pretendard"/>
+                <a:ea typeface="Pretendard"/>
+                <a:cs typeface="Pretendard"/>
+              </a:rPr>
+              <a:t>connect:</a:t>
+            </a:r>
+          </a:p>
+          <a:p>
+            <a:pPr algn="ctr">
+              <a:lnSpc>
+                <a:spcPct val="115000"/>
+              </a:lnSpc>
+            </a:pPr>
+            <a:r>
+              <a:rPr sz="1875" b="0">
+                <a:solidFill>
+                  <a:srgbClr val="3D3D3D"/>
+                </a:solidFill>
+                <a:latin typeface="Pretendard"/>
+                <a:ea typeface="Pretendard"/>
+                <a:cs typeface="Pretendard"/>
+              </a:rPr>
+              <a:t>connection refused</a:t>
+            </a:r>
+          </a:p>
+        </p:txBody>
+      </p:sp>
+      <p:sp>
+        <p:nvSpPr>
+          <p:cNvPr id="32" name="TextBox 31"/>
+          <p:cNvSpPr txBox="1"/>
+          <p:nvPr/>
+        </p:nvSpPr>
+        <p:spPr>
+          <a:xfrm>
+            <a:off x="1143000" y="7620000"/>
+            <a:ext cx="16002000" cy="342900"/>
+          </a:xfrm>
+          <a:prstGeom prst="rect">
+            <a:avLst/>
+          </a:prstGeom>
+          <a:noFill/>
+        </p:spPr>
+        <p:txBody>
+          <a:bodyPr wrap="square" lIns="0" rIns="0" tIns="0" bIns="0" anchor="t">
+            <a:spAutoFit/>
+          </a:bodyPr>
+          <a:lstStyle/>
+          <a:p>
+            <a:pPr algn="l">
+              <a:lnSpc>
+                <a:spcPct val="100000"/>
+              </a:lnSpc>
+            </a:pPr>
+            <a:r>
+              <a:rPr sz="1875" b="1">
+                <a:solidFill>
+                  <a:srgbClr val="7D7D7D"/>
+                </a:solidFill>
+                <a:latin typeface="Pretendard"/>
+                <a:ea typeface="Pretendard"/>
+                <a:cs typeface="Pretendard"/>
+              </a:rPr>
+              <a:t>mc alias set 으로 직접 붙어 본다 — 새 mc 의 첫 명령 위 초록 네 줄은 설정 파일 안내(무시)</a:t>
+            </a:r>
+          </a:p>
+        </p:txBody>
+      </p:sp>
+      <p:sp>
+        <p:nvSpPr>
+          <p:cNvPr id="33" name="Rectangle 32"/>
+          <p:cNvSpPr/>
+          <p:nvPr/>
+        </p:nvSpPr>
+        <p:spPr>
+          <a:xfrm>
+            <a:off x="1143000" y="8058150"/>
+            <a:ext cx="16002000" cy="9525"/>
+          </a:xfrm>
+          <a:prstGeom prst="rect">
+            <a:avLst/>
+          </a:prstGeom>
+          <a:solidFill>
+            <a:srgbClr val="DCE1E8"/>
           </a:solidFill>
           <a:ln>
             <a:noFill/>
@@ -12362,137 +13117,7 @@
       </p:sp>
       <p:sp>
         <p:nvSpPr>
-          <p:cNvPr id="19" name="TextBox 18"/>
-          <p:cNvSpPr txBox="1"/>
-          <p:nvPr/>
-        </p:nvSpPr>
-        <p:spPr>
-          <a:xfrm>
-            <a:off x="12065000" y="4171950"/>
-            <a:ext cx="5080000" cy="419100"/>
-          </a:xfrm>
-          <a:prstGeom prst="rect">
-            <a:avLst/>
-          </a:prstGeom>
-          <a:noFill/>
-        </p:spPr>
-        <p:txBody>
-          <a:bodyPr wrap="square" lIns="0" rIns="0" tIns="0" bIns="0" anchor="t">
-            <a:spAutoFit/>
-          </a:bodyPr>
-          <a:lstStyle/>
-          <a:p>
-            <a:pPr algn="ctr">
-              <a:lnSpc>
-                <a:spcPct val="100000"/>
-              </a:lnSpc>
-            </a:pPr>
-            <a:r>
-              <a:rPr sz="2475" b="1">
-                <a:solidFill>
-                  <a:srgbClr val="FFFFFF"/>
-                </a:solidFill>
-                <a:latin typeface="Pretendard"/>
-                <a:ea typeface="Pretendard"/>
-                <a:cs typeface="Pretendard"/>
-              </a:rPr>
-              <a:t>③ mc 안 localhost</a:t>
-            </a:r>
-          </a:p>
-        </p:txBody>
-      </p:sp>
-      <p:sp>
-        <p:nvSpPr>
-          <p:cNvPr id="20" name="TextBox 19"/>
-          <p:cNvSpPr txBox="1"/>
-          <p:nvPr/>
-        </p:nvSpPr>
-        <p:spPr>
-          <a:xfrm>
-            <a:off x="12274550" y="5143500"/>
-            <a:ext cx="4660900" cy="1524000"/>
-          </a:xfrm>
-          <a:prstGeom prst="rect">
-            <a:avLst/>
-          </a:prstGeom>
-          <a:noFill/>
-        </p:spPr>
-        <p:txBody>
-          <a:bodyPr wrap="square" lIns="0" rIns="0" tIns="0" bIns="0" anchor="t">
-            <a:spAutoFit/>
-          </a:bodyPr>
-          <a:lstStyle/>
-          <a:p>
-            <a:pPr algn="ctr">
-              <a:lnSpc>
-                <a:spcPct val="146000"/>
-              </a:lnSpc>
-            </a:pPr>
-            <a:r>
-              <a:rPr sz="2100" b="0">
-                <a:solidFill>
-                  <a:srgbClr val="3D3D3D"/>
-                </a:solidFill>
-                <a:latin typeface="Pretendard"/>
-                <a:ea typeface="Pretendard"/>
-                <a:cs typeface="Pretendard"/>
-              </a:rPr>
-              <a:t>wget localhost:9000</a:t>
-            </a:r>
-          </a:p>
-          <a:p>
-            <a:pPr algn="ctr">
-              <a:lnSpc>
-                <a:spcPct val="146000"/>
-              </a:lnSpc>
-            </a:pPr>
-            <a:r>
-              <a:rPr sz="2100" b="0">
-                <a:solidFill>
-                  <a:srgbClr val="3D3D3D"/>
-                </a:solidFill>
-                <a:latin typeface="Pretendard"/>
-                <a:ea typeface="Pretendard"/>
-                <a:cs typeface="Pretendard"/>
-              </a:rPr>
-              <a:t>→ 실패 = 정상</a:t>
-            </a:r>
-          </a:p>
-        </p:txBody>
-      </p:sp>
-      <p:sp>
-        <p:nvSpPr>
-          <p:cNvPr id="21" name="Rectangle 20"/>
-          <p:cNvSpPr/>
-          <p:nvPr/>
-        </p:nvSpPr>
-        <p:spPr>
-          <a:xfrm>
-            <a:off x="1143000" y="8058150"/>
-            <a:ext cx="16002000" cy="9525"/>
-          </a:xfrm>
-          <a:prstGeom prst="rect">
-            <a:avLst/>
-          </a:prstGeom>
-          <a:solidFill>
-            <a:srgbClr val="DCE1E8"/>
-          </a:solidFill>
-          <a:ln>
-            <a:noFill/>
-          </a:ln>
-          <a:effectLst/>
-        </p:spPr>
-        <p:txBody>
-          <a:bodyPr rtlCol="0" anchor="ctr" wrap="square"/>
-          <a:lstStyle/>
-          <a:p>
-            <a:pPr algn="ctr"/>
-          </a:p>
-        </p:txBody>
-      </p:sp>
-      <p:sp>
-        <p:nvSpPr>
-          <p:cNvPr id="22" name="TextBox 21"/>
+          <p:cNvPr id="34" name="TextBox 33"/>
           <p:cNvSpPr txBox="1"/>
           <p:nvPr/>
         </p:nvSpPr>
@@ -12533,7 +13158,7 @@
       </p:sp>
       <p:sp>
         <p:nvSpPr>
-          <p:cNvPr id="23" name="TextBox 22"/>
+          <p:cNvPr id="35" name="TextBox 34"/>
           <p:cNvSpPr txBox="1"/>
           <p:nvPr/>
         </p:nvSpPr>
@@ -12757,7 +13382,7 @@
                 <a:ea typeface="Pretendard"/>
                 <a:cs typeface="Pretendard"/>
               </a:rPr>
-              <a:t>같은 9000 인데 — 왜 하나는 되고 하나는 안 되나</a:t>
+              <a:t>같은 9000 인데 — 왜 하나만 되나</a:t>
             </a:r>
           </a:p>
         </p:txBody>
@@ -13049,7 +13674,7 @@
                 <a:ea typeface="Pretendard"/>
                 <a:cs typeface="Pretendard"/>
               </a:rPr>
-              <a:t>wget</a:t>
+              <a:t>alias set</a:t>
             </a:r>
           </a:p>
         </p:txBody>
@@ -13326,7 +13951,7 @@
                 <a:ea typeface="Pretendard"/>
                 <a:cs typeface="Pretendard"/>
               </a:rPr>
-              <a:t>health/live</a:t>
+              <a:t>Added</a:t>
             </a:r>
           </a:p>
         </p:txBody>
@@ -13663,7 +14288,7 @@
                 <a:ea typeface="Pretendard"/>
                 <a:cs typeface="Pretendard"/>
               </a:rPr>
-              <a:t>wget</a:t>
+              <a:t>alias set</a:t>
             </a:r>
           </a:p>
         </p:txBody>
@@ -14015,7 +14640,7 @@
                 <a:ea typeface="Pretendard"/>
                 <a:cs typeface="Pretendard"/>
               </a:rPr>
-              <a:t>아무것도 없음</a:t>
+              <a:t>connection refused</a:t>
             </a:r>
           </a:p>
         </p:txBody>
@@ -14564,7 +15189,7 @@
                 <a:ea typeface="Pretendard"/>
                 <a:cs typeface="Pretendard"/>
               </a:rPr>
-              <a:t>볼륨이 붙어 있는지</a:t>
+              <a:t>docker volume ls | grep minio · inspect</a:t>
             </a:r>
           </a:p>
         </p:txBody>
@@ -14605,7 +15230,7 @@
                 <a:ea typeface="Pretendard"/>
                 <a:cs typeface="Pretendard"/>
               </a:rPr>
-              <a:t>docker volume ls | grep minio · inspect 에 minio-data -&gt; /data</a:t>
+              <a:t>lakehouse_minio-data -&gt; /data — compose 가 폴더 이름을 앞에 붙인다</a:t>
             </a:r>
           </a:p>
         </p:txBody>
@@ -14751,7 +15376,7 @@
                 <a:ea typeface="Pretendard"/>
                 <a:cs typeface="Pretendard"/>
               </a:rPr>
-              <a:t>지웠다 다시 만들어도</a:t>
+              <a:t>docker compose down → up -d → ps</a:t>
             </a:r>
           </a:p>
         </p:txBody>
@@ -14792,7 +15417,7 @@
                 <a:ea typeface="Pretendard"/>
                 <a:cs typeface="Pretendard"/>
               </a:rPr>
-              <a:t>docker compose down → up -d → ps — 볼륨 목록에 minio-data 그대로</a:t>
+              <a:t>볼륨 그대로 — down 때 mc 만 10초는 sleep 이 종료 신호를 무시해서</a:t>
             </a:r>
           </a:p>
         </p:txBody>
@@ -14938,7 +15563,7 @@
                 <a:ea typeface="Pretendard"/>
                 <a:cs typeface="Pretendard"/>
               </a:rPr>
-              <a:t>로그를 읽는 법</a:t>
+              <a:t>docker compose logs minio | tail -n 12</a:t>
             </a:r>
           </a:p>
         </p:txBody>
@@ -14979,7 +15604,7 @@
                 <a:ea typeface="Pretendard"/>
                 <a:cs typeface="Pretendard"/>
               </a:rPr>
-              <a:t>docker compose logs minio | tail -n 20 · -f 는 Ctrl+C 로 빠져나온다</a:t>
+              <a:t>MinIO Object Storage Server 배너 · API: · WebUI: · 기본 계정 WARN</a:t>
             </a:r>
           </a:p>
         </p:txBody>
@@ -15054,7 +15679,7 @@
                 <a:ea typeface="Pretendard"/>
                 <a:cs typeface="Pretendard"/>
               </a:rPr>
-              <a:t>로그에서 찾을 것</a:t>
+              <a:t>막혔을 때</a:t>
             </a:r>
           </a:p>
         </p:txBody>
@@ -15095,7 +15720,7 @@
                 <a:ea typeface="Pretendard"/>
                 <a:cs typeface="Pretendard"/>
               </a:rPr>
-              <a:t>서버 배너</a:t>
+              <a:t>ps → logs</a:t>
             </a:r>
           </a:p>
           <a:p>
@@ -15113,7 +15738,7 @@
                 <a:ea typeface="Pretendard"/>
                 <a:cs typeface="Pretendard"/>
               </a:rPr>
-              <a:t>API 주소</a:t>
+              <a:t>→ 포트 충돌</a:t>
             </a:r>
           </a:p>
         </p:txBody>
